--- a/docs/pptx/entire/ritu-entire-linsubhr-ratio-anemia3.pptx
+++ b/docs/pptx/entire/ritu-entire-linsubhr-ratio-anemia3.pptx
@@ -2960,584 +2960,584 @@
           <p:spPr>
             <a:xfrm>
               <a:off x="1172049" y="2073503"/>
-              <a:ext cx="7090630" cy="3363462"/>
+              <a:ext cx="7090630" cy="3363803"/>
             </a:xfrm>
             <a:custGeom>
               <a:avLst/>
               <a:pathLst>
-                <a:path w="7090630" h="3363462">
+                <a:path w="7090630" h="3363803">
                   <a:moveTo>
-                    <a:pt x="685480" y="0"/>
+                    <a:pt x="689471" y="0"/>
                   </a:moveTo>
                   <a:lnTo>
-                    <a:pt x="716225" y="56426"/>
-                  </a:lnTo>
-                  <a:lnTo>
-                    <a:pt x="787847" y="183022"/>
-                  </a:lnTo>
-                  <a:lnTo>
-                    <a:pt x="859470" y="304942"/>
-                  </a:lnTo>
-                  <a:lnTo>
-                    <a:pt x="931092" y="422359"/>
-                  </a:lnTo>
-                  <a:lnTo>
-                    <a:pt x="1002715" y="535438"/>
-                  </a:lnTo>
-                  <a:lnTo>
-                    <a:pt x="1074337" y="644341"/>
-                  </a:lnTo>
-                  <a:lnTo>
-                    <a:pt x="1145960" y="749221"/>
-                  </a:lnTo>
-                  <a:lnTo>
-                    <a:pt x="1217582" y="850228"/>
-                  </a:lnTo>
-                  <a:lnTo>
-                    <a:pt x="1289205" y="947503"/>
-                  </a:lnTo>
-                  <a:lnTo>
-                    <a:pt x="1360827" y="1041185"/>
-                  </a:lnTo>
-                  <a:lnTo>
-                    <a:pt x="1432450" y="1131407"/>
-                  </a:lnTo>
-                  <a:lnTo>
-                    <a:pt x="1504073" y="1218296"/>
-                  </a:lnTo>
-                  <a:lnTo>
-                    <a:pt x="1575695" y="1301976"/>
-                  </a:lnTo>
-                  <a:lnTo>
-                    <a:pt x="1647318" y="1382565"/>
-                  </a:lnTo>
-                  <a:lnTo>
-                    <a:pt x="1718940" y="1460177"/>
-                  </a:lnTo>
-                  <a:lnTo>
-                    <a:pt x="1790563" y="1534922"/>
-                  </a:lnTo>
-                  <a:lnTo>
-                    <a:pt x="1862185" y="1606906"/>
-                  </a:lnTo>
-                  <a:lnTo>
-                    <a:pt x="1933808" y="1676232"/>
-                  </a:lnTo>
-                  <a:lnTo>
-                    <a:pt x="2005430" y="1742997"/>
-                  </a:lnTo>
-                  <a:lnTo>
-                    <a:pt x="2077053" y="1807295"/>
-                  </a:lnTo>
-                  <a:lnTo>
-                    <a:pt x="2148675" y="1869219"/>
-                  </a:lnTo>
-                  <a:lnTo>
-                    <a:pt x="2220298" y="1928856"/>
-                  </a:lnTo>
-                  <a:lnTo>
-                    <a:pt x="2291920" y="1986289"/>
-                  </a:lnTo>
-                  <a:lnTo>
-                    <a:pt x="2363543" y="2041601"/>
-                  </a:lnTo>
-                  <a:lnTo>
-                    <a:pt x="2435165" y="2094870"/>
-                  </a:lnTo>
-                  <a:lnTo>
-                    <a:pt x="2506788" y="2146172"/>
-                  </a:lnTo>
-                  <a:lnTo>
-                    <a:pt x="2578410" y="2195578"/>
-                  </a:lnTo>
-                  <a:lnTo>
-                    <a:pt x="2650033" y="2243160"/>
-                  </a:lnTo>
-                  <a:lnTo>
-                    <a:pt x="2721655" y="2288984"/>
-                  </a:lnTo>
-                  <a:lnTo>
-                    <a:pt x="2793278" y="2333115"/>
-                  </a:lnTo>
-                  <a:lnTo>
-                    <a:pt x="2864901" y="2375616"/>
-                  </a:lnTo>
-                  <a:lnTo>
-                    <a:pt x="2936523" y="2416548"/>
-                  </a:lnTo>
-                  <a:lnTo>
-                    <a:pt x="3008146" y="2455967"/>
-                  </a:lnTo>
-                  <a:lnTo>
-                    <a:pt x="3079768" y="2493931"/>
-                  </a:lnTo>
-                  <a:lnTo>
-                    <a:pt x="3151391" y="2530492"/>
-                  </a:lnTo>
-                  <a:lnTo>
-                    <a:pt x="3223013" y="2565703"/>
-                  </a:lnTo>
-                  <a:lnTo>
-                    <a:pt x="3294636" y="2599613"/>
-                  </a:lnTo>
-                  <a:lnTo>
-                    <a:pt x="3366258" y="2632270"/>
-                  </a:lnTo>
-                  <a:lnTo>
-                    <a:pt x="3437881" y="2657732"/>
-                  </a:lnTo>
-                  <a:lnTo>
-                    <a:pt x="3509503" y="2668975"/>
-                  </a:lnTo>
-                  <a:lnTo>
-                    <a:pt x="3581126" y="2680064"/>
-                  </a:lnTo>
-                  <a:lnTo>
-                    <a:pt x="3652748" y="2691003"/>
-                  </a:lnTo>
-                  <a:lnTo>
-                    <a:pt x="3724371" y="2701792"/>
-                  </a:lnTo>
-                  <a:lnTo>
-                    <a:pt x="3795993" y="2712435"/>
-                  </a:lnTo>
-                  <a:lnTo>
-                    <a:pt x="3867616" y="2722933"/>
-                  </a:lnTo>
-                  <a:lnTo>
-                    <a:pt x="3939238" y="2733288"/>
-                  </a:lnTo>
-                  <a:lnTo>
-                    <a:pt x="4010861" y="2743502"/>
-                  </a:lnTo>
-                  <a:lnTo>
-                    <a:pt x="4082483" y="2753577"/>
-                  </a:lnTo>
-                  <a:lnTo>
-                    <a:pt x="4154106" y="2763515"/>
-                  </a:lnTo>
-                  <a:lnTo>
-                    <a:pt x="4225729" y="2773318"/>
-                  </a:lnTo>
-                  <a:lnTo>
-                    <a:pt x="4297351" y="2782987"/>
-                  </a:lnTo>
-                  <a:lnTo>
-                    <a:pt x="4368974" y="2792525"/>
-                  </a:lnTo>
-                  <a:lnTo>
-                    <a:pt x="4440596" y="2801933"/>
-                  </a:lnTo>
-                  <a:lnTo>
-                    <a:pt x="4512219" y="2811212"/>
-                  </a:lnTo>
-                  <a:lnTo>
-                    <a:pt x="4583841" y="2820366"/>
-                  </a:lnTo>
-                  <a:lnTo>
-                    <a:pt x="4655464" y="2829395"/>
-                  </a:lnTo>
-                  <a:lnTo>
-                    <a:pt x="4727086" y="2838301"/>
-                  </a:lnTo>
-                  <a:lnTo>
-                    <a:pt x="4798709" y="2847086"/>
-                  </a:lnTo>
-                  <a:lnTo>
-                    <a:pt x="4870331" y="2855751"/>
-                  </a:lnTo>
-                  <a:lnTo>
-                    <a:pt x="4941954" y="2864298"/>
-                  </a:lnTo>
-                  <a:lnTo>
-                    <a:pt x="5013576" y="2872729"/>
-                  </a:lnTo>
-                  <a:lnTo>
-                    <a:pt x="5085199" y="2881046"/>
-                  </a:lnTo>
-                  <a:lnTo>
-                    <a:pt x="5156821" y="2889249"/>
-                  </a:lnTo>
-                  <a:lnTo>
-                    <a:pt x="5228444" y="2897340"/>
-                  </a:lnTo>
-                  <a:lnTo>
-                    <a:pt x="5300066" y="2905321"/>
-                  </a:lnTo>
-                  <a:lnTo>
-                    <a:pt x="5371689" y="2913194"/>
-                  </a:lnTo>
-                  <a:lnTo>
-                    <a:pt x="5443311" y="2920960"/>
-                  </a:lnTo>
-                  <a:lnTo>
-                    <a:pt x="5514934" y="2928619"/>
-                  </a:lnTo>
-                  <a:lnTo>
-                    <a:pt x="5586557" y="2936175"/>
-                  </a:lnTo>
-                  <a:lnTo>
-                    <a:pt x="5658179" y="2943628"/>
-                  </a:lnTo>
-                  <a:lnTo>
-                    <a:pt x="5729802" y="2950979"/>
-                  </a:lnTo>
-                  <a:lnTo>
-                    <a:pt x="5801424" y="2958230"/>
-                  </a:lnTo>
-                  <a:lnTo>
-                    <a:pt x="5873047" y="2965383"/>
-                  </a:lnTo>
-                  <a:lnTo>
-                    <a:pt x="5944669" y="2972438"/>
-                  </a:lnTo>
-                  <a:lnTo>
-                    <a:pt x="6016292" y="2979397"/>
-                  </a:lnTo>
-                  <a:lnTo>
-                    <a:pt x="6087914" y="2986261"/>
-                  </a:lnTo>
-                  <a:lnTo>
-                    <a:pt x="6159537" y="2993032"/>
-                  </a:lnTo>
-                  <a:lnTo>
-                    <a:pt x="6231159" y="2999711"/>
-                  </a:lnTo>
-                  <a:lnTo>
-                    <a:pt x="6302782" y="3006299"/>
-                  </a:lnTo>
-                  <a:lnTo>
-                    <a:pt x="6374404" y="3012798"/>
-                  </a:lnTo>
-                  <a:lnTo>
-                    <a:pt x="6446027" y="3019207"/>
-                  </a:lnTo>
-                  <a:lnTo>
-                    <a:pt x="6517649" y="3025530"/>
-                  </a:lnTo>
-                  <a:lnTo>
-                    <a:pt x="6589272" y="3031767"/>
-                  </a:lnTo>
-                  <a:lnTo>
-                    <a:pt x="6660894" y="3037918"/>
-                  </a:lnTo>
-                  <a:lnTo>
-                    <a:pt x="6732517" y="3043986"/>
-                  </a:lnTo>
-                  <a:lnTo>
-                    <a:pt x="6804139" y="3049972"/>
-                  </a:lnTo>
-                  <a:lnTo>
-                    <a:pt x="6875762" y="3055875"/>
-                  </a:lnTo>
-                  <a:lnTo>
-                    <a:pt x="6947385" y="3061699"/>
-                  </a:lnTo>
-                  <a:lnTo>
-                    <a:pt x="7019007" y="3067443"/>
-                  </a:lnTo>
-                  <a:lnTo>
-                    <a:pt x="7090630" y="3073109"/>
-                  </a:lnTo>
-                  <a:lnTo>
-                    <a:pt x="7090630" y="3363462"/>
-                  </a:lnTo>
-                  <a:lnTo>
-                    <a:pt x="7019007" y="3358849"/>
-                  </a:lnTo>
-                  <a:lnTo>
-                    <a:pt x="6947385" y="3354059"/>
-                  </a:lnTo>
-                  <a:lnTo>
-                    <a:pt x="6875762" y="3349085"/>
-                  </a:lnTo>
-                  <a:lnTo>
-                    <a:pt x="6804139" y="3343920"/>
-                  </a:lnTo>
-                  <a:lnTo>
-                    <a:pt x="6732517" y="3338557"/>
-                  </a:lnTo>
-                  <a:lnTo>
-                    <a:pt x="6660894" y="3332988"/>
-                  </a:lnTo>
-                  <a:lnTo>
-                    <a:pt x="6589272" y="3327206"/>
-                  </a:lnTo>
-                  <a:lnTo>
-                    <a:pt x="6517649" y="3321202"/>
-                  </a:lnTo>
-                  <a:lnTo>
-                    <a:pt x="6446027" y="3314968"/>
-                  </a:lnTo>
-                  <a:lnTo>
-                    <a:pt x="6374404" y="3308494"/>
-                  </a:lnTo>
-                  <a:lnTo>
-                    <a:pt x="6302782" y="3301773"/>
-                  </a:lnTo>
-                  <a:lnTo>
-                    <a:pt x="6231159" y="3294793"/>
-                  </a:lnTo>
-                  <a:lnTo>
-                    <a:pt x="6159537" y="3287546"/>
-                  </a:lnTo>
-                  <a:lnTo>
-                    <a:pt x="6087914" y="3280021"/>
-                  </a:lnTo>
-                  <a:lnTo>
-                    <a:pt x="6016292" y="3272208"/>
-                  </a:lnTo>
-                  <a:lnTo>
-                    <a:pt x="5944669" y="3264094"/>
-                  </a:lnTo>
-                  <a:lnTo>
-                    <a:pt x="5873047" y="3255670"/>
-                  </a:lnTo>
-                  <a:lnTo>
-                    <a:pt x="5801424" y="3246922"/>
-                  </a:lnTo>
-                  <a:lnTo>
-                    <a:pt x="5729802" y="3237839"/>
-                  </a:lnTo>
-                  <a:lnTo>
-                    <a:pt x="5658179" y="3228407"/>
-                  </a:lnTo>
-                  <a:lnTo>
-                    <a:pt x="5586557" y="3218614"/>
-                  </a:lnTo>
-                  <a:lnTo>
-                    <a:pt x="5514934" y="3208445"/>
-                  </a:lnTo>
-                  <a:lnTo>
-                    <a:pt x="5443311" y="3197886"/>
-                  </a:lnTo>
-                  <a:lnTo>
-                    <a:pt x="5371689" y="3186922"/>
-                  </a:lnTo>
-                  <a:lnTo>
-                    <a:pt x="5300066" y="3175538"/>
-                  </a:lnTo>
-                  <a:lnTo>
-                    <a:pt x="5228444" y="3163717"/>
-                  </a:lnTo>
-                  <a:lnTo>
-                    <a:pt x="5156821" y="3151442"/>
-                  </a:lnTo>
-                  <a:lnTo>
-                    <a:pt x="5085199" y="3138697"/>
-                  </a:lnTo>
-                  <a:lnTo>
-                    <a:pt x="5013576" y="3125463"/>
-                  </a:lnTo>
-                  <a:lnTo>
-                    <a:pt x="4941954" y="3111721"/>
-                  </a:lnTo>
-                  <a:lnTo>
-                    <a:pt x="4870331" y="3097453"/>
-                  </a:lnTo>
-                  <a:lnTo>
-                    <a:pt x="4798709" y="3082637"/>
-                  </a:lnTo>
-                  <a:lnTo>
-                    <a:pt x="4727086" y="3067253"/>
-                  </a:lnTo>
-                  <a:lnTo>
-                    <a:pt x="4655464" y="3051278"/>
-                  </a:lnTo>
-                  <a:lnTo>
-                    <a:pt x="4583841" y="3034691"/>
-                  </a:lnTo>
-                  <a:lnTo>
-                    <a:pt x="4512219" y="3017468"/>
-                  </a:lnTo>
-                  <a:lnTo>
-                    <a:pt x="4440596" y="2999585"/>
-                  </a:lnTo>
-                  <a:lnTo>
-                    <a:pt x="4368974" y="2981015"/>
-                  </a:lnTo>
-                  <a:lnTo>
-                    <a:pt x="4297351" y="2961733"/>
-                  </a:lnTo>
-                  <a:lnTo>
-                    <a:pt x="4225729" y="2941712"/>
-                  </a:lnTo>
-                  <a:lnTo>
-                    <a:pt x="4154106" y="2920923"/>
-                  </a:lnTo>
-                  <a:lnTo>
-                    <a:pt x="4082483" y="2899336"/>
-                  </a:lnTo>
-                  <a:lnTo>
-                    <a:pt x="4010861" y="2876922"/>
-                  </a:lnTo>
-                  <a:lnTo>
-                    <a:pt x="3939238" y="2853648"/>
-                  </a:lnTo>
-                  <a:lnTo>
-                    <a:pt x="3867616" y="2829481"/>
-                  </a:lnTo>
-                  <a:lnTo>
-                    <a:pt x="3795993" y="2804387"/>
-                  </a:lnTo>
-                  <a:lnTo>
-                    <a:pt x="3724371" y="2778331"/>
-                  </a:lnTo>
-                  <a:lnTo>
-                    <a:pt x="3652748" y="2751275"/>
-                  </a:lnTo>
-                  <a:lnTo>
-                    <a:pt x="3581126" y="2723182"/>
-                  </a:lnTo>
-                  <a:lnTo>
-                    <a:pt x="3509503" y="2694011"/>
-                  </a:lnTo>
-                  <a:lnTo>
-                    <a:pt x="3437881" y="2663722"/>
-                  </a:lnTo>
-                  <a:lnTo>
-                    <a:pt x="3366258" y="2646335"/>
-                  </a:lnTo>
-                  <a:lnTo>
-                    <a:pt x="3294636" y="2634780"/>
-                  </a:lnTo>
-                  <a:lnTo>
-                    <a:pt x="3223013" y="2623065"/>
-                  </a:lnTo>
-                  <a:lnTo>
-                    <a:pt x="3151391" y="2611189"/>
-                  </a:lnTo>
-                  <a:lnTo>
-                    <a:pt x="3079768" y="2599150"/>
-                  </a:lnTo>
-                  <a:lnTo>
-                    <a:pt x="3008146" y="2586944"/>
-                  </a:lnTo>
-                  <a:lnTo>
-                    <a:pt x="2936523" y="2574569"/>
-                  </a:lnTo>
-                  <a:lnTo>
-                    <a:pt x="2864901" y="2562024"/>
-                  </a:lnTo>
-                  <a:lnTo>
-                    <a:pt x="2793278" y="2549306"/>
-                  </a:lnTo>
-                  <a:lnTo>
-                    <a:pt x="2721655" y="2536412"/>
-                  </a:lnTo>
-                  <a:lnTo>
-                    <a:pt x="2650033" y="2523341"/>
-                  </a:lnTo>
-                  <a:lnTo>
-                    <a:pt x="2578410" y="2510089"/>
-                  </a:lnTo>
-                  <a:lnTo>
-                    <a:pt x="2506788" y="2496654"/>
-                  </a:lnTo>
-                  <a:lnTo>
-                    <a:pt x="2435165" y="2483034"/>
-                  </a:lnTo>
-                  <a:lnTo>
-                    <a:pt x="2363543" y="2469226"/>
-                  </a:lnTo>
-                  <a:lnTo>
-                    <a:pt x="2291920" y="2455227"/>
-                  </a:lnTo>
-                  <a:lnTo>
-                    <a:pt x="2220298" y="2441035"/>
-                  </a:lnTo>
-                  <a:lnTo>
-                    <a:pt x="2148675" y="2426648"/>
-                  </a:lnTo>
-                  <a:lnTo>
-                    <a:pt x="2077053" y="2412061"/>
-                  </a:lnTo>
-                  <a:lnTo>
-                    <a:pt x="2005430" y="2397274"/>
-                  </a:lnTo>
-                  <a:lnTo>
-                    <a:pt x="1933808" y="2382283"/>
-                  </a:lnTo>
-                  <a:lnTo>
-                    <a:pt x="1862185" y="2367084"/>
-                  </a:lnTo>
-                  <a:lnTo>
-                    <a:pt x="1790563" y="2351676"/>
-                  </a:lnTo>
-                  <a:lnTo>
-                    <a:pt x="1718940" y="2336056"/>
-                  </a:lnTo>
-                  <a:lnTo>
-                    <a:pt x="1647318" y="2320219"/>
-                  </a:lnTo>
-                  <a:lnTo>
-                    <a:pt x="1575695" y="2304165"/>
-                  </a:lnTo>
-                  <a:lnTo>
-                    <a:pt x="1504073" y="2287888"/>
-                  </a:lnTo>
-                  <a:lnTo>
-                    <a:pt x="1432450" y="2271388"/>
-                  </a:lnTo>
-                  <a:lnTo>
-                    <a:pt x="1360827" y="2254659"/>
-                  </a:lnTo>
-                  <a:lnTo>
-                    <a:pt x="1289205" y="2237700"/>
-                  </a:lnTo>
-                  <a:lnTo>
-                    <a:pt x="1217582" y="2220507"/>
-                  </a:lnTo>
-                  <a:lnTo>
-                    <a:pt x="1145960" y="2203076"/>
-                  </a:lnTo>
-                  <a:lnTo>
-                    <a:pt x="1074337" y="2185405"/>
-                  </a:lnTo>
-                  <a:lnTo>
-                    <a:pt x="1002715" y="2167490"/>
-                  </a:lnTo>
-                  <a:lnTo>
-                    <a:pt x="931092" y="2149328"/>
-                  </a:lnTo>
-                  <a:lnTo>
-                    <a:pt x="859470" y="2130915"/>
-                  </a:lnTo>
-                  <a:lnTo>
-                    <a:pt x="787847" y="2112248"/>
-                  </a:lnTo>
-                  <a:lnTo>
-                    <a:pt x="716225" y="2093324"/>
-                  </a:lnTo>
-                  <a:lnTo>
-                    <a:pt x="644602" y="2074139"/>
-                  </a:lnTo>
-                  <a:lnTo>
-                    <a:pt x="572980" y="2054688"/>
-                  </a:lnTo>
-                  <a:lnTo>
-                    <a:pt x="501357" y="2034970"/>
-                  </a:lnTo>
-                  <a:lnTo>
-                    <a:pt x="429735" y="2014979"/>
-                  </a:lnTo>
-                  <a:lnTo>
-                    <a:pt x="358112" y="1994713"/>
-                  </a:lnTo>
-                  <a:lnTo>
-                    <a:pt x="286490" y="1974167"/>
-                  </a:lnTo>
-                  <a:lnTo>
-                    <a:pt x="214867" y="1953337"/>
-                  </a:lnTo>
-                  <a:lnTo>
-                    <a:pt x="143245" y="1932220"/>
-                  </a:lnTo>
-                  <a:lnTo>
-                    <a:pt x="71622" y="1910812"/>
-                  </a:lnTo>
-                  <a:lnTo>
-                    <a:pt x="0" y="1889108"/>
+                    <a:pt x="716225" y="49278"/>
+                  </a:lnTo>
+                  <a:lnTo>
+                    <a:pt x="787847" y="176321"/>
+                  </a:lnTo>
+                  <a:lnTo>
+                    <a:pt x="859470" y="298664"/>
+                  </a:lnTo>
+                  <a:lnTo>
+                    <a:pt x="931092" y="416482"/>
+                  </a:lnTo>
+                  <a:lnTo>
+                    <a:pt x="1002715" y="529942"/>
+                  </a:lnTo>
+                  <a:lnTo>
+                    <a:pt x="1074337" y="639205"/>
+                  </a:lnTo>
+                  <a:lnTo>
+                    <a:pt x="1145960" y="744426"/>
+                  </a:lnTo>
+                  <a:lnTo>
+                    <a:pt x="1217582" y="845756"/>
+                  </a:lnTo>
+                  <a:lnTo>
+                    <a:pt x="1289205" y="943336"/>
+                  </a:lnTo>
+                  <a:lnTo>
+                    <a:pt x="1360827" y="1037308"/>
+                  </a:lnTo>
+                  <a:lnTo>
+                    <a:pt x="1432450" y="1127803"/>
+                  </a:lnTo>
+                  <a:lnTo>
+                    <a:pt x="1504073" y="1214951"/>
+                  </a:lnTo>
+                  <a:lnTo>
+                    <a:pt x="1575695" y="1298875"/>
+                  </a:lnTo>
+                  <a:lnTo>
+                    <a:pt x="1647318" y="1379694"/>
+                  </a:lnTo>
+                  <a:lnTo>
+                    <a:pt x="1718940" y="1457525"/>
+                  </a:lnTo>
+                  <a:lnTo>
+                    <a:pt x="1790563" y="1532476"/>
+                  </a:lnTo>
+                  <a:lnTo>
+                    <a:pt x="1862185" y="1604654"/>
+                  </a:lnTo>
+                  <a:lnTo>
+                    <a:pt x="1933808" y="1674163"/>
+                  </a:lnTo>
+                  <a:lnTo>
+                    <a:pt x="2005430" y="1741101"/>
+                  </a:lnTo>
+                  <a:lnTo>
+                    <a:pt x="2077053" y="1805562"/>
+                  </a:lnTo>
+                  <a:lnTo>
+                    <a:pt x="2148675" y="1867639"/>
+                  </a:lnTo>
+                  <a:lnTo>
+                    <a:pt x="2220298" y="1927420"/>
+                  </a:lnTo>
+                  <a:lnTo>
+                    <a:pt x="2291920" y="1984989"/>
+                  </a:lnTo>
+                  <a:lnTo>
+                    <a:pt x="2363543" y="2040429"/>
+                  </a:lnTo>
+                  <a:lnTo>
+                    <a:pt x="2435165" y="2093819"/>
+                  </a:lnTo>
+                  <a:lnTo>
+                    <a:pt x="2506788" y="2145233"/>
+                  </a:lnTo>
+                  <a:lnTo>
+                    <a:pt x="2578410" y="2194745"/>
+                  </a:lnTo>
+                  <a:lnTo>
+                    <a:pt x="2650033" y="2242426"/>
+                  </a:lnTo>
+                  <a:lnTo>
+                    <a:pt x="2721655" y="2288343"/>
+                  </a:lnTo>
+                  <a:lnTo>
+                    <a:pt x="2793278" y="2332562"/>
+                  </a:lnTo>
+                  <a:lnTo>
+                    <a:pt x="2864901" y="2375145"/>
+                  </a:lnTo>
+                  <a:lnTo>
+                    <a:pt x="2936523" y="2416153"/>
+                  </a:lnTo>
+                  <a:lnTo>
+                    <a:pt x="3008146" y="2455644"/>
+                  </a:lnTo>
+                  <a:lnTo>
+                    <a:pt x="3079768" y="2493674"/>
+                  </a:lnTo>
+                  <a:lnTo>
+                    <a:pt x="3151391" y="2530297"/>
+                  </a:lnTo>
+                  <a:lnTo>
+                    <a:pt x="3223013" y="2565566"/>
+                  </a:lnTo>
+                  <a:lnTo>
+                    <a:pt x="3294636" y="2599530"/>
+                  </a:lnTo>
+                  <a:lnTo>
+                    <a:pt x="3366258" y="2632238"/>
+                  </a:lnTo>
+                  <a:lnTo>
+                    <a:pt x="3437881" y="2657740"/>
+                  </a:lnTo>
+                  <a:lnTo>
+                    <a:pt x="3509503" y="2669009"/>
+                  </a:lnTo>
+                  <a:lnTo>
+                    <a:pt x="3581126" y="2680125"/>
+                  </a:lnTo>
+                  <a:lnTo>
+                    <a:pt x="3652748" y="2691088"/>
+                  </a:lnTo>
+                  <a:lnTo>
+                    <a:pt x="3724371" y="2701902"/>
+                  </a:lnTo>
+                  <a:lnTo>
+                    <a:pt x="3795993" y="2712569"/>
+                  </a:lnTo>
+                  <a:lnTo>
+                    <a:pt x="3867616" y="2723090"/>
+                  </a:lnTo>
+                  <a:lnTo>
+                    <a:pt x="3939238" y="2733467"/>
+                  </a:lnTo>
+                  <a:lnTo>
+                    <a:pt x="4010861" y="2743703"/>
+                  </a:lnTo>
+                  <a:lnTo>
+                    <a:pt x="4082483" y="2753800"/>
+                  </a:lnTo>
+                  <a:lnTo>
+                    <a:pt x="4154106" y="2763758"/>
+                  </a:lnTo>
+                  <a:lnTo>
+                    <a:pt x="4225729" y="2773581"/>
+                  </a:lnTo>
+                  <a:lnTo>
+                    <a:pt x="4297351" y="2783269"/>
+                  </a:lnTo>
+                  <a:lnTo>
+                    <a:pt x="4368974" y="2792826"/>
+                  </a:lnTo>
+                  <a:lnTo>
+                    <a:pt x="4440596" y="2802252"/>
+                  </a:lnTo>
+                  <a:lnTo>
+                    <a:pt x="4512219" y="2811549"/>
+                  </a:lnTo>
+                  <a:lnTo>
+                    <a:pt x="4583841" y="2820720"/>
+                  </a:lnTo>
+                  <a:lnTo>
+                    <a:pt x="4655464" y="2829766"/>
+                  </a:lnTo>
+                  <a:lnTo>
+                    <a:pt x="4727086" y="2838688"/>
+                  </a:lnTo>
+                  <a:lnTo>
+                    <a:pt x="4798709" y="2847488"/>
+                  </a:lnTo>
+                  <a:lnTo>
+                    <a:pt x="4870331" y="2856168"/>
+                  </a:lnTo>
+                  <a:lnTo>
+                    <a:pt x="4941954" y="2864730"/>
+                  </a:lnTo>
+                  <a:lnTo>
+                    <a:pt x="5013576" y="2873175"/>
+                  </a:lnTo>
+                  <a:lnTo>
+                    <a:pt x="5085199" y="2881505"/>
+                  </a:lnTo>
+                  <a:lnTo>
+                    <a:pt x="5156821" y="2889722"/>
+                  </a:lnTo>
+                  <a:lnTo>
+                    <a:pt x="5228444" y="2897826"/>
+                  </a:lnTo>
+                  <a:lnTo>
+                    <a:pt x="5300066" y="2905819"/>
+                  </a:lnTo>
+                  <a:lnTo>
+                    <a:pt x="5371689" y="2913704"/>
+                  </a:lnTo>
+                  <a:lnTo>
+                    <a:pt x="5443311" y="2921481"/>
+                  </a:lnTo>
+                  <a:lnTo>
+                    <a:pt x="5514934" y="2929152"/>
+                  </a:lnTo>
+                  <a:lnTo>
+                    <a:pt x="5586557" y="2936718"/>
+                  </a:lnTo>
+                  <a:lnTo>
+                    <a:pt x="5658179" y="2944181"/>
+                  </a:lnTo>
+                  <a:lnTo>
+                    <a:pt x="5729802" y="2951542"/>
+                  </a:lnTo>
+                  <a:lnTo>
+                    <a:pt x="5801424" y="2958803"/>
+                  </a:lnTo>
+                  <a:lnTo>
+                    <a:pt x="5873047" y="2965964"/>
+                  </a:lnTo>
+                  <a:lnTo>
+                    <a:pt x="5944669" y="2973028"/>
+                  </a:lnTo>
+                  <a:lnTo>
+                    <a:pt x="6016292" y="2979996"/>
+                  </a:lnTo>
+                  <a:lnTo>
+                    <a:pt x="6087914" y="2986869"/>
+                  </a:lnTo>
+                  <a:lnTo>
+                    <a:pt x="6159537" y="2993647"/>
+                  </a:lnTo>
+                  <a:lnTo>
+                    <a:pt x="6231159" y="3000334"/>
+                  </a:lnTo>
+                  <a:lnTo>
+                    <a:pt x="6302782" y="3006929"/>
+                  </a:lnTo>
+                  <a:lnTo>
+                    <a:pt x="6374404" y="3013434"/>
+                  </a:lnTo>
+                  <a:lnTo>
+                    <a:pt x="6446027" y="3019850"/>
+                  </a:lnTo>
+                  <a:lnTo>
+                    <a:pt x="6517649" y="3026179"/>
+                  </a:lnTo>
+                  <a:lnTo>
+                    <a:pt x="6589272" y="3032422"/>
+                  </a:lnTo>
+                  <a:lnTo>
+                    <a:pt x="6660894" y="3038579"/>
+                  </a:lnTo>
+                  <a:lnTo>
+                    <a:pt x="6732517" y="3044652"/>
+                  </a:lnTo>
+                  <a:lnTo>
+                    <a:pt x="6804139" y="3050643"/>
+                  </a:lnTo>
+                  <a:lnTo>
+                    <a:pt x="6875762" y="3056552"/>
+                  </a:lnTo>
+                  <a:lnTo>
+                    <a:pt x="6947385" y="3062380"/>
+                  </a:lnTo>
+                  <a:lnTo>
+                    <a:pt x="7019007" y="3068128"/>
+                  </a:lnTo>
+                  <a:lnTo>
+                    <a:pt x="7090630" y="3073798"/>
+                  </a:lnTo>
+                  <a:lnTo>
+                    <a:pt x="7090630" y="3363803"/>
+                  </a:lnTo>
+                  <a:lnTo>
+                    <a:pt x="7019007" y="3359196"/>
+                  </a:lnTo>
+                  <a:lnTo>
+                    <a:pt x="6947385" y="3354412"/>
+                  </a:lnTo>
+                  <a:lnTo>
+                    <a:pt x="6875762" y="3349444"/>
+                  </a:lnTo>
+                  <a:lnTo>
+                    <a:pt x="6804139" y="3344285"/>
+                  </a:lnTo>
+                  <a:lnTo>
+                    <a:pt x="6732517" y="3338928"/>
+                  </a:lnTo>
+                  <a:lnTo>
+                    <a:pt x="6660894" y="3333365"/>
+                  </a:lnTo>
+                  <a:lnTo>
+                    <a:pt x="6589272" y="3327589"/>
+                  </a:lnTo>
+                  <a:lnTo>
+                    <a:pt x="6517649" y="3321591"/>
+                  </a:lnTo>
+                  <a:lnTo>
+                    <a:pt x="6446027" y="3315362"/>
+                  </a:lnTo>
+                  <a:lnTo>
+                    <a:pt x="6374404" y="3308894"/>
+                  </a:lnTo>
+                  <a:lnTo>
+                    <a:pt x="6302782" y="3302178"/>
+                  </a:lnTo>
+                  <a:lnTo>
+                    <a:pt x="6231159" y="3295203"/>
+                  </a:lnTo>
+                  <a:lnTo>
+                    <a:pt x="6159537" y="3287961"/>
+                  </a:lnTo>
+                  <a:lnTo>
+                    <a:pt x="6087914" y="3280441"/>
+                  </a:lnTo>
+                  <a:lnTo>
+                    <a:pt x="6016292" y="3272632"/>
+                  </a:lnTo>
+                  <a:lnTo>
+                    <a:pt x="5944669" y="3264522"/>
+                  </a:lnTo>
+                  <a:lnTo>
+                    <a:pt x="5873047" y="3256102"/>
+                  </a:lnTo>
+                  <a:lnTo>
+                    <a:pt x="5801424" y="3247357"/>
+                  </a:lnTo>
+                  <a:lnTo>
+                    <a:pt x="5729802" y="3238277"/>
+                  </a:lnTo>
+                  <a:lnTo>
+                    <a:pt x="5658179" y="3228849"/>
+                  </a:lnTo>
+                  <a:lnTo>
+                    <a:pt x="5586557" y="3219058"/>
+                  </a:lnTo>
+                  <a:lnTo>
+                    <a:pt x="5514934" y="3208891"/>
+                  </a:lnTo>
+                  <a:lnTo>
+                    <a:pt x="5443311" y="3198333"/>
+                  </a:lnTo>
+                  <a:lnTo>
+                    <a:pt x="5371689" y="3187370"/>
+                  </a:lnTo>
+                  <a:lnTo>
+                    <a:pt x="5300066" y="3175986"/>
+                  </a:lnTo>
+                  <a:lnTo>
+                    <a:pt x="5228444" y="3164164"/>
+                  </a:lnTo>
+                  <a:lnTo>
+                    <a:pt x="5156821" y="3151888"/>
+                  </a:lnTo>
+                  <a:lnTo>
+                    <a:pt x="5085199" y="3139141"/>
+                  </a:lnTo>
+                  <a:lnTo>
+                    <a:pt x="5013576" y="3125904"/>
+                  </a:lnTo>
+                  <a:lnTo>
+                    <a:pt x="4941954" y="3112159"/>
+                  </a:lnTo>
+                  <a:lnTo>
+                    <a:pt x="4870331" y="3097886"/>
+                  </a:lnTo>
+                  <a:lnTo>
+                    <a:pt x="4798709" y="3083065"/>
+                  </a:lnTo>
+                  <a:lnTo>
+                    <a:pt x="4727086" y="3067674"/>
+                  </a:lnTo>
+                  <a:lnTo>
+                    <a:pt x="4655464" y="3051692"/>
+                  </a:lnTo>
+                  <a:lnTo>
+                    <a:pt x="4583841" y="3035096"/>
+                  </a:lnTo>
+                  <a:lnTo>
+                    <a:pt x="4512219" y="3017863"/>
+                  </a:lnTo>
+                  <a:lnTo>
+                    <a:pt x="4440596" y="2999967"/>
+                  </a:lnTo>
+                  <a:lnTo>
+                    <a:pt x="4368974" y="2981385"/>
+                  </a:lnTo>
+                  <a:lnTo>
+                    <a:pt x="4297351" y="2962088"/>
+                  </a:lnTo>
+                  <a:lnTo>
+                    <a:pt x="4225729" y="2942051"/>
+                  </a:lnTo>
+                  <a:lnTo>
+                    <a:pt x="4154106" y="2921243"/>
+                  </a:lnTo>
+                  <a:lnTo>
+                    <a:pt x="4082483" y="2899637"/>
+                  </a:lnTo>
+                  <a:lnTo>
+                    <a:pt x="4010861" y="2877200"/>
+                  </a:lnTo>
+                  <a:lnTo>
+                    <a:pt x="3939238" y="2853902"/>
+                  </a:lnTo>
+                  <a:lnTo>
+                    <a:pt x="3867616" y="2829709"/>
+                  </a:lnTo>
+                  <a:lnTo>
+                    <a:pt x="3795993" y="2804586"/>
+                  </a:lnTo>
+                  <a:lnTo>
+                    <a:pt x="3724371" y="2778499"/>
+                  </a:lnTo>
+                  <a:lnTo>
+                    <a:pt x="3652748" y="2751409"/>
+                  </a:lnTo>
+                  <a:lnTo>
+                    <a:pt x="3581126" y="2723279"/>
+                  </a:lnTo>
+                  <a:lnTo>
+                    <a:pt x="3509503" y="2694068"/>
+                  </a:lnTo>
+                  <a:lnTo>
+                    <a:pt x="3437881" y="2663735"/>
+                  </a:lnTo>
+                  <a:lnTo>
+                    <a:pt x="3366258" y="2646315"/>
+                  </a:lnTo>
+                  <a:lnTo>
+                    <a:pt x="3294636" y="2634733"/>
+                  </a:lnTo>
+                  <a:lnTo>
+                    <a:pt x="3223013" y="2622989"/>
+                  </a:lnTo>
+                  <a:lnTo>
+                    <a:pt x="3151391" y="2611084"/>
+                  </a:lnTo>
+                  <a:lnTo>
+                    <a:pt x="3079768" y="2599014"/>
+                  </a:lnTo>
+                  <a:lnTo>
+                    <a:pt x="3008146" y="2586776"/>
+                  </a:lnTo>
+                  <a:lnTo>
+                    <a:pt x="2936523" y="2574370"/>
+                  </a:lnTo>
+                  <a:lnTo>
+                    <a:pt x="2864901" y="2561792"/>
+                  </a:lnTo>
+                  <a:lnTo>
+                    <a:pt x="2793278" y="2549040"/>
+                  </a:lnTo>
+                  <a:lnTo>
+                    <a:pt x="2721655" y="2536112"/>
+                  </a:lnTo>
+                  <a:lnTo>
+                    <a:pt x="2650033" y="2523004"/>
+                  </a:lnTo>
+                  <a:lnTo>
+                    <a:pt x="2578410" y="2509716"/>
+                  </a:lnTo>
+                  <a:lnTo>
+                    <a:pt x="2506788" y="2496244"/>
+                  </a:lnTo>
+                  <a:lnTo>
+                    <a:pt x="2435165" y="2482585"/>
+                  </a:lnTo>
+                  <a:lnTo>
+                    <a:pt x="2363543" y="2468738"/>
+                  </a:lnTo>
+                  <a:lnTo>
+                    <a:pt x="2291920" y="2454698"/>
+                  </a:lnTo>
+                  <a:lnTo>
+                    <a:pt x="2220298" y="2440465"/>
+                  </a:lnTo>
+                  <a:lnTo>
+                    <a:pt x="2148675" y="2426035"/>
+                  </a:lnTo>
+                  <a:lnTo>
+                    <a:pt x="2077053" y="2411405"/>
+                  </a:lnTo>
+                  <a:lnTo>
+                    <a:pt x="2005430" y="2396573"/>
+                  </a:lnTo>
+                  <a:lnTo>
+                    <a:pt x="1933808" y="2381536"/>
+                  </a:lnTo>
+                  <a:lnTo>
+                    <a:pt x="1862185" y="2366291"/>
+                  </a:lnTo>
+                  <a:lnTo>
+                    <a:pt x="1790563" y="2350835"/>
+                  </a:lnTo>
+                  <a:lnTo>
+                    <a:pt x="1718940" y="2335165"/>
+                  </a:lnTo>
+                  <a:lnTo>
+                    <a:pt x="1647318" y="2319278"/>
+                  </a:lnTo>
+                  <a:lnTo>
+                    <a:pt x="1575695" y="2303172"/>
+                  </a:lnTo>
+                  <a:lnTo>
+                    <a:pt x="1504073" y="2286843"/>
+                  </a:lnTo>
+                  <a:lnTo>
+                    <a:pt x="1432450" y="2270288"/>
+                  </a:lnTo>
+                  <a:lnTo>
+                    <a:pt x="1360827" y="2253504"/>
+                  </a:lnTo>
+                  <a:lnTo>
+                    <a:pt x="1289205" y="2236488"/>
+                  </a:lnTo>
+                  <a:lnTo>
+                    <a:pt x="1217582" y="2219236"/>
+                  </a:lnTo>
+                  <a:lnTo>
+                    <a:pt x="1145960" y="2201746"/>
+                  </a:lnTo>
+                  <a:lnTo>
+                    <a:pt x="1074337" y="2184014"/>
+                  </a:lnTo>
+                  <a:lnTo>
+                    <a:pt x="1002715" y="2166037"/>
+                  </a:lnTo>
+                  <a:lnTo>
+                    <a:pt x="931092" y="2147811"/>
+                  </a:lnTo>
+                  <a:lnTo>
+                    <a:pt x="859470" y="2129333"/>
+                  </a:lnTo>
+                  <a:lnTo>
+                    <a:pt x="787847" y="2110600"/>
+                  </a:lnTo>
+                  <a:lnTo>
+                    <a:pt x="716225" y="2091607"/>
+                  </a:lnTo>
+                  <a:lnTo>
+                    <a:pt x="644602" y="2072352"/>
+                  </a:lnTo>
+                  <a:lnTo>
+                    <a:pt x="572980" y="2052830"/>
+                  </a:lnTo>
+                  <a:lnTo>
+                    <a:pt x="501357" y="2033038"/>
+                  </a:lnTo>
+                  <a:lnTo>
+                    <a:pt x="429735" y="2012973"/>
+                  </a:lnTo>
+                  <a:lnTo>
+                    <a:pt x="358112" y="1992630"/>
+                  </a:lnTo>
+                  <a:lnTo>
+                    <a:pt x="286490" y="1972006"/>
+                  </a:lnTo>
+                  <a:lnTo>
+                    <a:pt x="214867" y="1951096"/>
+                  </a:lnTo>
+                  <a:lnTo>
+                    <a:pt x="143245" y="1929897"/>
+                  </a:lnTo>
+                  <a:lnTo>
+                    <a:pt x="71622" y="1908405"/>
+                  </a:lnTo>
+                  <a:lnTo>
+                    <a:pt x="0" y="1886616"/>
                   </a:lnTo>
                   <a:close/>
                 </a:path>
@@ -3563,285 +3563,285 @@
           </p:nvSpPr>
           <p:spPr>
             <a:xfrm>
-              <a:off x="1857530" y="2073503"/>
-              <a:ext cx="6405149" cy="3073109"/>
+              <a:off x="1861521" y="2073503"/>
+              <a:ext cx="6401158" cy="3073798"/>
             </a:xfrm>
             <a:custGeom>
               <a:avLst/>
               <a:pathLst>
-                <a:path w="6405149" h="3073109">
+                <a:path w="6401158" h="3073798">
                   <a:moveTo>
                     <a:pt x="0" y="0"/>
                   </a:moveTo>
                   <a:lnTo>
-                    <a:pt x="30744" y="56426"/>
-                  </a:lnTo>
-                  <a:lnTo>
-                    <a:pt x="102366" y="183022"/>
-                  </a:lnTo>
-                  <a:lnTo>
-                    <a:pt x="173989" y="304942"/>
-                  </a:lnTo>
-                  <a:lnTo>
-                    <a:pt x="245612" y="422359"/>
-                  </a:lnTo>
-                  <a:lnTo>
-                    <a:pt x="317234" y="535438"/>
-                  </a:lnTo>
-                  <a:lnTo>
-                    <a:pt x="388857" y="644341"/>
-                  </a:lnTo>
-                  <a:lnTo>
-                    <a:pt x="460479" y="749221"/>
-                  </a:lnTo>
-                  <a:lnTo>
-                    <a:pt x="532102" y="850228"/>
-                  </a:lnTo>
-                  <a:lnTo>
-                    <a:pt x="603724" y="947503"/>
-                  </a:lnTo>
-                  <a:lnTo>
-                    <a:pt x="675347" y="1041185"/>
-                  </a:lnTo>
-                  <a:lnTo>
-                    <a:pt x="746969" y="1131407"/>
-                  </a:lnTo>
-                  <a:lnTo>
-                    <a:pt x="818592" y="1218296"/>
-                  </a:lnTo>
-                  <a:lnTo>
-                    <a:pt x="890214" y="1301976"/>
-                  </a:lnTo>
-                  <a:lnTo>
-                    <a:pt x="961837" y="1382565"/>
-                  </a:lnTo>
-                  <a:lnTo>
-                    <a:pt x="1033459" y="1460177"/>
-                  </a:lnTo>
-                  <a:lnTo>
-                    <a:pt x="1105082" y="1534922"/>
-                  </a:lnTo>
-                  <a:lnTo>
-                    <a:pt x="1176704" y="1606906"/>
-                  </a:lnTo>
-                  <a:lnTo>
-                    <a:pt x="1248327" y="1676232"/>
-                  </a:lnTo>
-                  <a:lnTo>
-                    <a:pt x="1319949" y="1742997"/>
-                  </a:lnTo>
-                  <a:lnTo>
-                    <a:pt x="1391572" y="1807295"/>
-                  </a:lnTo>
-                  <a:lnTo>
-                    <a:pt x="1463194" y="1869219"/>
-                  </a:lnTo>
-                  <a:lnTo>
-                    <a:pt x="1534817" y="1928856"/>
-                  </a:lnTo>
-                  <a:lnTo>
-                    <a:pt x="1606440" y="1986289"/>
-                  </a:lnTo>
-                  <a:lnTo>
-                    <a:pt x="1678062" y="2041601"/>
-                  </a:lnTo>
-                  <a:lnTo>
-                    <a:pt x="1749685" y="2094870"/>
-                  </a:lnTo>
-                  <a:lnTo>
-                    <a:pt x="1821307" y="2146172"/>
-                  </a:lnTo>
-                  <a:lnTo>
-                    <a:pt x="1892930" y="2195578"/>
-                  </a:lnTo>
-                  <a:lnTo>
-                    <a:pt x="1964552" y="2243160"/>
-                  </a:lnTo>
-                  <a:lnTo>
-                    <a:pt x="2036175" y="2288984"/>
-                  </a:lnTo>
-                  <a:lnTo>
-                    <a:pt x="2107797" y="2333115"/>
-                  </a:lnTo>
-                  <a:lnTo>
-                    <a:pt x="2179420" y="2375616"/>
-                  </a:lnTo>
-                  <a:lnTo>
-                    <a:pt x="2251042" y="2416548"/>
-                  </a:lnTo>
-                  <a:lnTo>
-                    <a:pt x="2322665" y="2455967"/>
-                  </a:lnTo>
-                  <a:lnTo>
-                    <a:pt x="2394287" y="2493931"/>
-                  </a:lnTo>
-                  <a:lnTo>
-                    <a:pt x="2465910" y="2530492"/>
-                  </a:lnTo>
-                  <a:lnTo>
-                    <a:pt x="2537532" y="2565703"/>
-                  </a:lnTo>
-                  <a:lnTo>
-                    <a:pt x="2609155" y="2599613"/>
-                  </a:lnTo>
-                  <a:lnTo>
-                    <a:pt x="2680777" y="2632270"/>
-                  </a:lnTo>
-                  <a:lnTo>
-                    <a:pt x="2752400" y="2657732"/>
-                  </a:lnTo>
-                  <a:lnTo>
-                    <a:pt x="2824022" y="2668975"/>
-                  </a:lnTo>
-                  <a:lnTo>
-                    <a:pt x="2895645" y="2680064"/>
-                  </a:lnTo>
-                  <a:lnTo>
-                    <a:pt x="2967268" y="2691003"/>
-                  </a:lnTo>
-                  <a:lnTo>
-                    <a:pt x="3038890" y="2701792"/>
-                  </a:lnTo>
-                  <a:lnTo>
-                    <a:pt x="3110513" y="2712435"/>
-                  </a:lnTo>
-                  <a:lnTo>
-                    <a:pt x="3182135" y="2722933"/>
-                  </a:lnTo>
-                  <a:lnTo>
-                    <a:pt x="3253758" y="2733288"/>
-                  </a:lnTo>
-                  <a:lnTo>
-                    <a:pt x="3325380" y="2743502"/>
-                  </a:lnTo>
-                  <a:lnTo>
-                    <a:pt x="3397003" y="2753577"/>
-                  </a:lnTo>
-                  <a:lnTo>
-                    <a:pt x="3468625" y="2763515"/>
-                  </a:lnTo>
-                  <a:lnTo>
-                    <a:pt x="3540248" y="2773318"/>
-                  </a:lnTo>
-                  <a:lnTo>
-                    <a:pt x="3611870" y="2782987"/>
-                  </a:lnTo>
-                  <a:lnTo>
-                    <a:pt x="3683493" y="2792525"/>
-                  </a:lnTo>
-                  <a:lnTo>
-                    <a:pt x="3755115" y="2801933"/>
-                  </a:lnTo>
-                  <a:lnTo>
-                    <a:pt x="3826738" y="2811212"/>
-                  </a:lnTo>
-                  <a:lnTo>
-                    <a:pt x="3898360" y="2820366"/>
-                  </a:lnTo>
-                  <a:lnTo>
-                    <a:pt x="3969983" y="2829395"/>
-                  </a:lnTo>
-                  <a:lnTo>
-                    <a:pt x="4041605" y="2838301"/>
-                  </a:lnTo>
-                  <a:lnTo>
-                    <a:pt x="4113228" y="2847086"/>
-                  </a:lnTo>
-                  <a:lnTo>
-                    <a:pt x="4184850" y="2855751"/>
-                  </a:lnTo>
-                  <a:lnTo>
-                    <a:pt x="4256473" y="2864298"/>
-                  </a:lnTo>
-                  <a:lnTo>
-                    <a:pt x="4328096" y="2872729"/>
-                  </a:lnTo>
-                  <a:lnTo>
-                    <a:pt x="4399718" y="2881046"/>
-                  </a:lnTo>
-                  <a:lnTo>
-                    <a:pt x="4471341" y="2889249"/>
-                  </a:lnTo>
-                  <a:lnTo>
-                    <a:pt x="4542963" y="2897340"/>
-                  </a:lnTo>
-                  <a:lnTo>
-                    <a:pt x="4614586" y="2905321"/>
-                  </a:lnTo>
-                  <a:lnTo>
-                    <a:pt x="4686208" y="2913194"/>
-                  </a:lnTo>
-                  <a:lnTo>
-                    <a:pt x="4757831" y="2920960"/>
-                  </a:lnTo>
-                  <a:lnTo>
-                    <a:pt x="4829453" y="2928619"/>
-                  </a:lnTo>
-                  <a:lnTo>
-                    <a:pt x="4901076" y="2936175"/>
-                  </a:lnTo>
-                  <a:lnTo>
-                    <a:pt x="4972698" y="2943628"/>
-                  </a:lnTo>
-                  <a:lnTo>
-                    <a:pt x="5044321" y="2950979"/>
-                  </a:lnTo>
-                  <a:lnTo>
-                    <a:pt x="5115943" y="2958230"/>
-                  </a:lnTo>
-                  <a:lnTo>
-                    <a:pt x="5187566" y="2965383"/>
-                  </a:lnTo>
-                  <a:lnTo>
-                    <a:pt x="5259188" y="2972438"/>
-                  </a:lnTo>
-                  <a:lnTo>
-                    <a:pt x="5330811" y="2979397"/>
-                  </a:lnTo>
-                  <a:lnTo>
-                    <a:pt x="5402433" y="2986261"/>
-                  </a:lnTo>
-                  <a:lnTo>
-                    <a:pt x="5474056" y="2993032"/>
-                  </a:lnTo>
-                  <a:lnTo>
-                    <a:pt x="5545678" y="2999711"/>
-                  </a:lnTo>
-                  <a:lnTo>
-                    <a:pt x="5617301" y="3006299"/>
-                  </a:lnTo>
-                  <a:lnTo>
-                    <a:pt x="5688924" y="3012798"/>
-                  </a:lnTo>
-                  <a:lnTo>
-                    <a:pt x="5760546" y="3019207"/>
-                  </a:lnTo>
-                  <a:lnTo>
-                    <a:pt x="5832169" y="3025530"/>
-                  </a:lnTo>
-                  <a:lnTo>
-                    <a:pt x="5903791" y="3031767"/>
-                  </a:lnTo>
-                  <a:lnTo>
-                    <a:pt x="5975414" y="3037918"/>
-                  </a:lnTo>
-                  <a:lnTo>
-                    <a:pt x="6047036" y="3043986"/>
-                  </a:lnTo>
-                  <a:lnTo>
-                    <a:pt x="6118659" y="3049972"/>
-                  </a:lnTo>
-                  <a:lnTo>
-                    <a:pt x="6190281" y="3055875"/>
-                  </a:lnTo>
-                  <a:lnTo>
-                    <a:pt x="6261904" y="3061699"/>
-                  </a:lnTo>
-                  <a:lnTo>
-                    <a:pt x="6333526" y="3067443"/>
-                  </a:lnTo>
-                  <a:lnTo>
-                    <a:pt x="6405149" y="3073109"/>
+                    <a:pt x="26753" y="49278"/>
+                  </a:lnTo>
+                  <a:lnTo>
+                    <a:pt x="98376" y="176321"/>
+                  </a:lnTo>
+                  <a:lnTo>
+                    <a:pt x="169998" y="298664"/>
+                  </a:lnTo>
+                  <a:lnTo>
+                    <a:pt x="241621" y="416482"/>
+                  </a:lnTo>
+                  <a:lnTo>
+                    <a:pt x="313243" y="529942"/>
+                  </a:lnTo>
+                  <a:lnTo>
+                    <a:pt x="384866" y="639205"/>
+                  </a:lnTo>
+                  <a:lnTo>
+                    <a:pt x="456488" y="744426"/>
+                  </a:lnTo>
+                  <a:lnTo>
+                    <a:pt x="528111" y="845756"/>
+                  </a:lnTo>
+                  <a:lnTo>
+                    <a:pt x="599733" y="943336"/>
+                  </a:lnTo>
+                  <a:lnTo>
+                    <a:pt x="671356" y="1037308"/>
+                  </a:lnTo>
+                  <a:lnTo>
+                    <a:pt x="742978" y="1127803"/>
+                  </a:lnTo>
+                  <a:lnTo>
+                    <a:pt x="814601" y="1214951"/>
+                  </a:lnTo>
+                  <a:lnTo>
+                    <a:pt x="886223" y="1298875"/>
+                  </a:lnTo>
+                  <a:lnTo>
+                    <a:pt x="957846" y="1379694"/>
+                  </a:lnTo>
+                  <a:lnTo>
+                    <a:pt x="1029468" y="1457525"/>
+                  </a:lnTo>
+                  <a:lnTo>
+                    <a:pt x="1101091" y="1532476"/>
+                  </a:lnTo>
+                  <a:lnTo>
+                    <a:pt x="1172714" y="1604654"/>
+                  </a:lnTo>
+                  <a:lnTo>
+                    <a:pt x="1244336" y="1674163"/>
+                  </a:lnTo>
+                  <a:lnTo>
+                    <a:pt x="1315959" y="1741101"/>
+                  </a:lnTo>
+                  <a:lnTo>
+                    <a:pt x="1387581" y="1805562"/>
+                  </a:lnTo>
+                  <a:lnTo>
+                    <a:pt x="1459204" y="1867639"/>
+                  </a:lnTo>
+                  <a:lnTo>
+                    <a:pt x="1530826" y="1927420"/>
+                  </a:lnTo>
+                  <a:lnTo>
+                    <a:pt x="1602449" y="1984989"/>
+                  </a:lnTo>
+                  <a:lnTo>
+                    <a:pt x="1674071" y="2040429"/>
+                  </a:lnTo>
+                  <a:lnTo>
+                    <a:pt x="1745694" y="2093819"/>
+                  </a:lnTo>
+                  <a:lnTo>
+                    <a:pt x="1817316" y="2145233"/>
+                  </a:lnTo>
+                  <a:lnTo>
+                    <a:pt x="1888939" y="2194745"/>
+                  </a:lnTo>
+                  <a:lnTo>
+                    <a:pt x="1960561" y="2242426"/>
+                  </a:lnTo>
+                  <a:lnTo>
+                    <a:pt x="2032184" y="2288343"/>
+                  </a:lnTo>
+                  <a:lnTo>
+                    <a:pt x="2103806" y="2332562"/>
+                  </a:lnTo>
+                  <a:lnTo>
+                    <a:pt x="2175429" y="2375145"/>
+                  </a:lnTo>
+                  <a:lnTo>
+                    <a:pt x="2247051" y="2416153"/>
+                  </a:lnTo>
+                  <a:lnTo>
+                    <a:pt x="2318674" y="2455644"/>
+                  </a:lnTo>
+                  <a:lnTo>
+                    <a:pt x="2390296" y="2493674"/>
+                  </a:lnTo>
+                  <a:lnTo>
+                    <a:pt x="2461919" y="2530297"/>
+                  </a:lnTo>
+                  <a:lnTo>
+                    <a:pt x="2533542" y="2565566"/>
+                  </a:lnTo>
+                  <a:lnTo>
+                    <a:pt x="2605164" y="2599530"/>
+                  </a:lnTo>
+                  <a:lnTo>
+                    <a:pt x="2676787" y="2632238"/>
+                  </a:lnTo>
+                  <a:lnTo>
+                    <a:pt x="2748409" y="2657740"/>
+                  </a:lnTo>
+                  <a:lnTo>
+                    <a:pt x="2820032" y="2669009"/>
+                  </a:lnTo>
+                  <a:lnTo>
+                    <a:pt x="2891654" y="2680125"/>
+                  </a:lnTo>
+                  <a:lnTo>
+                    <a:pt x="2963277" y="2691088"/>
+                  </a:lnTo>
+                  <a:lnTo>
+                    <a:pt x="3034899" y="2701902"/>
+                  </a:lnTo>
+                  <a:lnTo>
+                    <a:pt x="3106522" y="2712569"/>
+                  </a:lnTo>
+                  <a:lnTo>
+                    <a:pt x="3178144" y="2723090"/>
+                  </a:lnTo>
+                  <a:lnTo>
+                    <a:pt x="3249767" y="2733467"/>
+                  </a:lnTo>
+                  <a:lnTo>
+                    <a:pt x="3321389" y="2743703"/>
+                  </a:lnTo>
+                  <a:lnTo>
+                    <a:pt x="3393012" y="2753800"/>
+                  </a:lnTo>
+                  <a:lnTo>
+                    <a:pt x="3464634" y="2763758"/>
+                  </a:lnTo>
+                  <a:lnTo>
+                    <a:pt x="3536257" y="2773581"/>
+                  </a:lnTo>
+                  <a:lnTo>
+                    <a:pt x="3607879" y="2783269"/>
+                  </a:lnTo>
+                  <a:lnTo>
+                    <a:pt x="3679502" y="2792826"/>
+                  </a:lnTo>
+                  <a:lnTo>
+                    <a:pt x="3751124" y="2802252"/>
+                  </a:lnTo>
+                  <a:lnTo>
+                    <a:pt x="3822747" y="2811549"/>
+                  </a:lnTo>
+                  <a:lnTo>
+                    <a:pt x="3894370" y="2820720"/>
+                  </a:lnTo>
+                  <a:lnTo>
+                    <a:pt x="3965992" y="2829766"/>
+                  </a:lnTo>
+                  <a:lnTo>
+                    <a:pt x="4037615" y="2838688"/>
+                  </a:lnTo>
+                  <a:lnTo>
+                    <a:pt x="4109237" y="2847488"/>
+                  </a:lnTo>
+                  <a:lnTo>
+                    <a:pt x="4180860" y="2856168"/>
+                  </a:lnTo>
+                  <a:lnTo>
+                    <a:pt x="4252482" y="2864730"/>
+                  </a:lnTo>
+                  <a:lnTo>
+                    <a:pt x="4324105" y="2873175"/>
+                  </a:lnTo>
+                  <a:lnTo>
+                    <a:pt x="4395727" y="2881505"/>
+                  </a:lnTo>
+                  <a:lnTo>
+                    <a:pt x="4467350" y="2889722"/>
+                  </a:lnTo>
+                  <a:lnTo>
+                    <a:pt x="4538972" y="2897826"/>
+                  </a:lnTo>
+                  <a:lnTo>
+                    <a:pt x="4610595" y="2905819"/>
+                  </a:lnTo>
+                  <a:lnTo>
+                    <a:pt x="4682217" y="2913704"/>
+                  </a:lnTo>
+                  <a:lnTo>
+                    <a:pt x="4753840" y="2921481"/>
+                  </a:lnTo>
+                  <a:lnTo>
+                    <a:pt x="4825462" y="2929152"/>
+                  </a:lnTo>
+                  <a:lnTo>
+                    <a:pt x="4897085" y="2936718"/>
+                  </a:lnTo>
+                  <a:lnTo>
+                    <a:pt x="4968707" y="2944181"/>
+                  </a:lnTo>
+                  <a:lnTo>
+                    <a:pt x="5040330" y="2951542"/>
+                  </a:lnTo>
+                  <a:lnTo>
+                    <a:pt x="5111952" y="2958803"/>
+                  </a:lnTo>
+                  <a:lnTo>
+                    <a:pt x="5183575" y="2965964"/>
+                  </a:lnTo>
+                  <a:lnTo>
+                    <a:pt x="5255198" y="2973028"/>
+                  </a:lnTo>
+                  <a:lnTo>
+                    <a:pt x="5326820" y="2979996"/>
+                  </a:lnTo>
+                  <a:lnTo>
+                    <a:pt x="5398443" y="2986869"/>
+                  </a:lnTo>
+                  <a:lnTo>
+                    <a:pt x="5470065" y="2993647"/>
+                  </a:lnTo>
+                  <a:lnTo>
+                    <a:pt x="5541688" y="3000334"/>
+                  </a:lnTo>
+                  <a:lnTo>
+                    <a:pt x="5613310" y="3006929"/>
+                  </a:lnTo>
+                  <a:lnTo>
+                    <a:pt x="5684933" y="3013434"/>
+                  </a:lnTo>
+                  <a:lnTo>
+                    <a:pt x="5756555" y="3019850"/>
+                  </a:lnTo>
+                  <a:lnTo>
+                    <a:pt x="5828178" y="3026179"/>
+                  </a:lnTo>
+                  <a:lnTo>
+                    <a:pt x="5899800" y="3032422"/>
+                  </a:lnTo>
+                  <a:lnTo>
+                    <a:pt x="5971423" y="3038579"/>
+                  </a:lnTo>
+                  <a:lnTo>
+                    <a:pt x="6043045" y="3044652"/>
+                  </a:lnTo>
+                  <a:lnTo>
+                    <a:pt x="6114668" y="3050643"/>
+                  </a:lnTo>
+                  <a:lnTo>
+                    <a:pt x="6186290" y="3056552"/>
+                  </a:lnTo>
+                  <a:lnTo>
+                    <a:pt x="6257913" y="3062380"/>
+                  </a:lnTo>
+                  <a:lnTo>
+                    <a:pt x="6329535" y="3068128"/>
+                  </a:lnTo>
+                  <a:lnTo>
+                    <a:pt x="6401158" y="3073798"/>
                   </a:lnTo>
                 </a:path>
               </a:pathLst>
@@ -3861,309 +3861,309 @@
           </p:nvSpPr>
           <p:spPr>
             <a:xfrm>
-              <a:off x="1172049" y="3962611"/>
-              <a:ext cx="7090630" cy="1474354"/>
+              <a:off x="1172049" y="3960119"/>
+              <a:ext cx="7090630" cy="1477187"/>
             </a:xfrm>
             <a:custGeom>
               <a:avLst/>
               <a:pathLst>
-                <a:path w="7090630" h="1474354">
+                <a:path w="7090630" h="1477187">
                   <a:moveTo>
-                    <a:pt x="7090630" y="1474354"/>
+                    <a:pt x="7090630" y="1477187"/>
                   </a:moveTo>
                   <a:lnTo>
-                    <a:pt x="7019007" y="1469741"/>
-                  </a:lnTo>
-                  <a:lnTo>
-                    <a:pt x="6947385" y="1464950"/>
-                  </a:lnTo>
-                  <a:lnTo>
-                    <a:pt x="6875762" y="1459976"/>
-                  </a:lnTo>
-                  <a:lnTo>
-                    <a:pt x="6804139" y="1454812"/>
-                  </a:lnTo>
-                  <a:lnTo>
-                    <a:pt x="6732517" y="1449449"/>
-                  </a:lnTo>
-                  <a:lnTo>
-                    <a:pt x="6660894" y="1443880"/>
-                  </a:lnTo>
-                  <a:lnTo>
-                    <a:pt x="6589272" y="1438098"/>
-                  </a:lnTo>
-                  <a:lnTo>
-                    <a:pt x="6517649" y="1432094"/>
-                  </a:lnTo>
-                  <a:lnTo>
-                    <a:pt x="6446027" y="1425860"/>
-                  </a:lnTo>
-                  <a:lnTo>
-                    <a:pt x="6374404" y="1419386"/>
-                  </a:lnTo>
-                  <a:lnTo>
-                    <a:pt x="6302782" y="1412665"/>
-                  </a:lnTo>
-                  <a:lnTo>
-                    <a:pt x="6231159" y="1405685"/>
-                  </a:lnTo>
-                  <a:lnTo>
-                    <a:pt x="6159537" y="1398438"/>
-                  </a:lnTo>
-                  <a:lnTo>
-                    <a:pt x="6087914" y="1390913"/>
-                  </a:lnTo>
-                  <a:lnTo>
-                    <a:pt x="6016292" y="1383099"/>
-                  </a:lnTo>
-                  <a:lnTo>
-                    <a:pt x="5944669" y="1374986"/>
-                  </a:lnTo>
-                  <a:lnTo>
-                    <a:pt x="5873047" y="1366561"/>
-                  </a:lnTo>
-                  <a:lnTo>
-                    <a:pt x="5801424" y="1357814"/>
-                  </a:lnTo>
-                  <a:lnTo>
-                    <a:pt x="5729802" y="1348731"/>
-                  </a:lnTo>
-                  <a:lnTo>
-                    <a:pt x="5658179" y="1339299"/>
-                  </a:lnTo>
-                  <a:lnTo>
-                    <a:pt x="5586557" y="1329506"/>
-                  </a:lnTo>
-                  <a:lnTo>
-                    <a:pt x="5514934" y="1319337"/>
-                  </a:lnTo>
-                  <a:lnTo>
-                    <a:pt x="5443311" y="1308778"/>
-                  </a:lnTo>
-                  <a:lnTo>
-                    <a:pt x="5371689" y="1297814"/>
-                  </a:lnTo>
-                  <a:lnTo>
-                    <a:pt x="5300066" y="1286430"/>
-                  </a:lnTo>
-                  <a:lnTo>
-                    <a:pt x="5228444" y="1274608"/>
-                  </a:lnTo>
-                  <a:lnTo>
-                    <a:pt x="5156821" y="1262334"/>
-                  </a:lnTo>
-                  <a:lnTo>
-                    <a:pt x="5085199" y="1249589"/>
-                  </a:lnTo>
-                  <a:lnTo>
-                    <a:pt x="5013576" y="1236355"/>
-                  </a:lnTo>
-                  <a:lnTo>
-                    <a:pt x="4941954" y="1222613"/>
-                  </a:lnTo>
-                  <a:lnTo>
-                    <a:pt x="4870331" y="1208344"/>
-                  </a:lnTo>
-                  <a:lnTo>
-                    <a:pt x="4798709" y="1193529"/>
-                  </a:lnTo>
-                  <a:lnTo>
-                    <a:pt x="4727086" y="1178144"/>
-                  </a:lnTo>
-                  <a:lnTo>
-                    <a:pt x="4655464" y="1162170"/>
-                  </a:lnTo>
-                  <a:lnTo>
-                    <a:pt x="4583841" y="1145583"/>
-                  </a:lnTo>
-                  <a:lnTo>
-                    <a:pt x="4512219" y="1128360"/>
-                  </a:lnTo>
-                  <a:lnTo>
-                    <a:pt x="4440596" y="1110476"/>
-                  </a:lnTo>
-                  <a:lnTo>
-                    <a:pt x="4368974" y="1091907"/>
-                  </a:lnTo>
-                  <a:lnTo>
-                    <a:pt x="4297351" y="1072625"/>
-                  </a:lnTo>
-                  <a:lnTo>
-                    <a:pt x="4225729" y="1052604"/>
-                  </a:lnTo>
-                  <a:lnTo>
-                    <a:pt x="4154106" y="1031815"/>
-                  </a:lnTo>
-                  <a:lnTo>
-                    <a:pt x="4082483" y="1010228"/>
-                  </a:lnTo>
-                  <a:lnTo>
-                    <a:pt x="4010861" y="987814"/>
-                  </a:lnTo>
-                  <a:lnTo>
-                    <a:pt x="3939238" y="964539"/>
-                  </a:lnTo>
-                  <a:lnTo>
-                    <a:pt x="3867616" y="940372"/>
-                  </a:lnTo>
-                  <a:lnTo>
-                    <a:pt x="3795993" y="915279"/>
-                  </a:lnTo>
-                  <a:lnTo>
-                    <a:pt x="3724371" y="889223"/>
-                  </a:lnTo>
-                  <a:lnTo>
-                    <a:pt x="3652748" y="862167"/>
-                  </a:lnTo>
-                  <a:lnTo>
-                    <a:pt x="3581126" y="834074"/>
-                  </a:lnTo>
-                  <a:lnTo>
-                    <a:pt x="3509503" y="804903"/>
-                  </a:lnTo>
-                  <a:lnTo>
-                    <a:pt x="3437881" y="774613"/>
-                  </a:lnTo>
-                  <a:lnTo>
-                    <a:pt x="3366258" y="757226"/>
-                  </a:lnTo>
-                  <a:lnTo>
-                    <a:pt x="3294636" y="745671"/>
-                  </a:lnTo>
-                  <a:lnTo>
-                    <a:pt x="3223013" y="733957"/>
-                  </a:lnTo>
-                  <a:lnTo>
-                    <a:pt x="3151391" y="722081"/>
-                  </a:lnTo>
-                  <a:lnTo>
-                    <a:pt x="3079768" y="710041"/>
-                  </a:lnTo>
-                  <a:lnTo>
-                    <a:pt x="3008146" y="697836"/>
-                  </a:lnTo>
-                  <a:lnTo>
-                    <a:pt x="2936523" y="685461"/>
-                  </a:lnTo>
-                  <a:lnTo>
-                    <a:pt x="2864901" y="672916"/>
-                  </a:lnTo>
-                  <a:lnTo>
-                    <a:pt x="2793278" y="660198"/>
-                  </a:lnTo>
-                  <a:lnTo>
-                    <a:pt x="2721655" y="647304"/>
-                  </a:lnTo>
-                  <a:lnTo>
-                    <a:pt x="2650033" y="634233"/>
-                  </a:lnTo>
-                  <a:lnTo>
-                    <a:pt x="2578410" y="620981"/>
-                  </a:lnTo>
-                  <a:lnTo>
-                    <a:pt x="2506788" y="607546"/>
-                  </a:lnTo>
-                  <a:lnTo>
-                    <a:pt x="2435165" y="593926"/>
-                  </a:lnTo>
-                  <a:lnTo>
-                    <a:pt x="2363543" y="580117"/>
-                  </a:lnTo>
-                  <a:lnTo>
-                    <a:pt x="2291920" y="566119"/>
-                  </a:lnTo>
-                  <a:lnTo>
-                    <a:pt x="2220298" y="551927"/>
-                  </a:lnTo>
-                  <a:lnTo>
-                    <a:pt x="2148675" y="537539"/>
-                  </a:lnTo>
-                  <a:lnTo>
-                    <a:pt x="2077053" y="522953"/>
-                  </a:lnTo>
-                  <a:lnTo>
-                    <a:pt x="2005430" y="508166"/>
-                  </a:lnTo>
-                  <a:lnTo>
-                    <a:pt x="1933808" y="493174"/>
-                  </a:lnTo>
-                  <a:lnTo>
-                    <a:pt x="1862185" y="477976"/>
-                  </a:lnTo>
-                  <a:lnTo>
-                    <a:pt x="1790563" y="462568"/>
-                  </a:lnTo>
-                  <a:lnTo>
-                    <a:pt x="1718940" y="446947"/>
-                  </a:lnTo>
-                  <a:lnTo>
-                    <a:pt x="1647318" y="431111"/>
-                  </a:lnTo>
-                  <a:lnTo>
-                    <a:pt x="1575695" y="415056"/>
-                  </a:lnTo>
-                  <a:lnTo>
-                    <a:pt x="1504073" y="398780"/>
-                  </a:lnTo>
-                  <a:lnTo>
-                    <a:pt x="1432450" y="382279"/>
-                  </a:lnTo>
-                  <a:lnTo>
-                    <a:pt x="1360827" y="365551"/>
-                  </a:lnTo>
-                  <a:lnTo>
-                    <a:pt x="1289205" y="348592"/>
-                  </a:lnTo>
-                  <a:lnTo>
-                    <a:pt x="1217582" y="331398"/>
-                  </a:lnTo>
-                  <a:lnTo>
-                    <a:pt x="1145960" y="313968"/>
-                  </a:lnTo>
-                  <a:lnTo>
-                    <a:pt x="1074337" y="296297"/>
-                  </a:lnTo>
-                  <a:lnTo>
-                    <a:pt x="1002715" y="278382"/>
-                  </a:lnTo>
-                  <a:lnTo>
-                    <a:pt x="931092" y="260220"/>
-                  </a:lnTo>
-                  <a:lnTo>
-                    <a:pt x="859470" y="241807"/>
-                  </a:lnTo>
-                  <a:lnTo>
-                    <a:pt x="787847" y="223140"/>
-                  </a:lnTo>
-                  <a:lnTo>
-                    <a:pt x="716225" y="204216"/>
-                  </a:lnTo>
-                  <a:lnTo>
-                    <a:pt x="644602" y="185030"/>
-                  </a:lnTo>
-                  <a:lnTo>
-                    <a:pt x="572980" y="165580"/>
-                  </a:lnTo>
-                  <a:lnTo>
-                    <a:pt x="501357" y="145862"/>
-                  </a:lnTo>
-                  <a:lnTo>
-                    <a:pt x="429735" y="125871"/>
-                  </a:lnTo>
-                  <a:lnTo>
-                    <a:pt x="358112" y="105605"/>
-                  </a:lnTo>
-                  <a:lnTo>
-                    <a:pt x="286490" y="85058"/>
-                  </a:lnTo>
-                  <a:lnTo>
-                    <a:pt x="214867" y="64229"/>
-                  </a:lnTo>
-                  <a:lnTo>
-                    <a:pt x="143245" y="43112"/>
-                  </a:lnTo>
-                  <a:lnTo>
-                    <a:pt x="71622" y="21703"/>
+                    <a:pt x="7019007" y="1472579"/>
+                  </a:lnTo>
+                  <a:lnTo>
+                    <a:pt x="6947385" y="1467795"/>
+                  </a:lnTo>
+                  <a:lnTo>
+                    <a:pt x="6875762" y="1462827"/>
+                  </a:lnTo>
+                  <a:lnTo>
+                    <a:pt x="6804139" y="1457668"/>
+                  </a:lnTo>
+                  <a:lnTo>
+                    <a:pt x="6732517" y="1452312"/>
+                  </a:lnTo>
+                  <a:lnTo>
+                    <a:pt x="6660894" y="1446749"/>
+                  </a:lnTo>
+                  <a:lnTo>
+                    <a:pt x="6589272" y="1440972"/>
+                  </a:lnTo>
+                  <a:lnTo>
+                    <a:pt x="6517649" y="1434974"/>
+                  </a:lnTo>
+                  <a:lnTo>
+                    <a:pt x="6446027" y="1428746"/>
+                  </a:lnTo>
+                  <a:lnTo>
+                    <a:pt x="6374404" y="1422278"/>
+                  </a:lnTo>
+                  <a:lnTo>
+                    <a:pt x="6302782" y="1415561"/>
+                  </a:lnTo>
+                  <a:lnTo>
+                    <a:pt x="6231159" y="1408587"/>
+                  </a:lnTo>
+                  <a:lnTo>
+                    <a:pt x="6159537" y="1401345"/>
+                  </a:lnTo>
+                  <a:lnTo>
+                    <a:pt x="6087914" y="1393824"/>
+                  </a:lnTo>
+                  <a:lnTo>
+                    <a:pt x="6016292" y="1386015"/>
+                  </a:lnTo>
+                  <a:lnTo>
+                    <a:pt x="5944669" y="1377906"/>
+                  </a:lnTo>
+                  <a:lnTo>
+                    <a:pt x="5873047" y="1369485"/>
+                  </a:lnTo>
+                  <a:lnTo>
+                    <a:pt x="5801424" y="1360741"/>
+                  </a:lnTo>
+                  <a:lnTo>
+                    <a:pt x="5729802" y="1351661"/>
+                  </a:lnTo>
+                  <a:lnTo>
+                    <a:pt x="5658179" y="1342232"/>
+                  </a:lnTo>
+                  <a:lnTo>
+                    <a:pt x="5586557" y="1332441"/>
+                  </a:lnTo>
+                  <a:lnTo>
+                    <a:pt x="5514934" y="1322274"/>
+                  </a:lnTo>
+                  <a:lnTo>
+                    <a:pt x="5443311" y="1311717"/>
+                  </a:lnTo>
+                  <a:lnTo>
+                    <a:pt x="5371689" y="1300753"/>
+                  </a:lnTo>
+                  <a:lnTo>
+                    <a:pt x="5300066" y="1289369"/>
+                  </a:lnTo>
+                  <a:lnTo>
+                    <a:pt x="5228444" y="1277548"/>
+                  </a:lnTo>
+                  <a:lnTo>
+                    <a:pt x="5156821" y="1265272"/>
+                  </a:lnTo>
+                  <a:lnTo>
+                    <a:pt x="5085199" y="1252525"/>
+                  </a:lnTo>
+                  <a:lnTo>
+                    <a:pt x="5013576" y="1239288"/>
+                  </a:lnTo>
+                  <a:lnTo>
+                    <a:pt x="4941954" y="1225543"/>
+                  </a:lnTo>
+                  <a:lnTo>
+                    <a:pt x="4870331" y="1211270"/>
+                  </a:lnTo>
+                  <a:lnTo>
+                    <a:pt x="4798709" y="1196448"/>
+                  </a:lnTo>
+                  <a:lnTo>
+                    <a:pt x="4727086" y="1181057"/>
+                  </a:lnTo>
+                  <a:lnTo>
+                    <a:pt x="4655464" y="1165075"/>
+                  </a:lnTo>
+                  <a:lnTo>
+                    <a:pt x="4583841" y="1148480"/>
+                  </a:lnTo>
+                  <a:lnTo>
+                    <a:pt x="4512219" y="1131246"/>
+                  </a:lnTo>
+                  <a:lnTo>
+                    <a:pt x="4440596" y="1113351"/>
+                  </a:lnTo>
+                  <a:lnTo>
+                    <a:pt x="4368974" y="1094768"/>
+                  </a:lnTo>
+                  <a:lnTo>
+                    <a:pt x="4297351" y="1075472"/>
+                  </a:lnTo>
+                  <a:lnTo>
+                    <a:pt x="4225729" y="1055434"/>
+                  </a:lnTo>
+                  <a:lnTo>
+                    <a:pt x="4154106" y="1034627"/>
+                  </a:lnTo>
+                  <a:lnTo>
+                    <a:pt x="4082483" y="1013020"/>
+                  </a:lnTo>
+                  <a:lnTo>
+                    <a:pt x="4010861" y="990584"/>
+                  </a:lnTo>
+                  <a:lnTo>
+                    <a:pt x="3939238" y="967285"/>
+                  </a:lnTo>
+                  <a:lnTo>
+                    <a:pt x="3867616" y="943092"/>
+                  </a:lnTo>
+                  <a:lnTo>
+                    <a:pt x="3795993" y="917970"/>
+                  </a:lnTo>
+                  <a:lnTo>
+                    <a:pt x="3724371" y="891882"/>
+                  </a:lnTo>
+                  <a:lnTo>
+                    <a:pt x="3652748" y="864793"/>
+                  </a:lnTo>
+                  <a:lnTo>
+                    <a:pt x="3581126" y="836662"/>
+                  </a:lnTo>
+                  <a:lnTo>
+                    <a:pt x="3509503" y="807452"/>
+                  </a:lnTo>
+                  <a:lnTo>
+                    <a:pt x="3437881" y="777119"/>
+                  </a:lnTo>
+                  <a:lnTo>
+                    <a:pt x="3366258" y="759699"/>
+                  </a:lnTo>
+                  <a:lnTo>
+                    <a:pt x="3294636" y="748116"/>
+                  </a:lnTo>
+                  <a:lnTo>
+                    <a:pt x="3223013" y="736373"/>
+                  </a:lnTo>
+                  <a:lnTo>
+                    <a:pt x="3151391" y="724467"/>
+                  </a:lnTo>
+                  <a:lnTo>
+                    <a:pt x="3079768" y="712397"/>
+                  </a:lnTo>
+                  <a:lnTo>
+                    <a:pt x="3008146" y="700160"/>
+                  </a:lnTo>
+                  <a:lnTo>
+                    <a:pt x="2936523" y="687754"/>
+                  </a:lnTo>
+                  <a:lnTo>
+                    <a:pt x="2864901" y="675176"/>
+                  </a:lnTo>
+                  <a:lnTo>
+                    <a:pt x="2793278" y="662424"/>
+                  </a:lnTo>
+                  <a:lnTo>
+                    <a:pt x="2721655" y="649495"/>
+                  </a:lnTo>
+                  <a:lnTo>
+                    <a:pt x="2650033" y="636388"/>
+                  </a:lnTo>
+                  <a:lnTo>
+                    <a:pt x="2578410" y="623100"/>
+                  </a:lnTo>
+                  <a:lnTo>
+                    <a:pt x="2506788" y="609627"/>
+                  </a:lnTo>
+                  <a:lnTo>
+                    <a:pt x="2435165" y="595969"/>
+                  </a:lnTo>
+                  <a:lnTo>
+                    <a:pt x="2363543" y="582121"/>
+                  </a:lnTo>
+                  <a:lnTo>
+                    <a:pt x="2291920" y="568082"/>
+                  </a:lnTo>
+                  <a:lnTo>
+                    <a:pt x="2220298" y="553849"/>
+                  </a:lnTo>
+                  <a:lnTo>
+                    <a:pt x="2148675" y="539419"/>
+                  </a:lnTo>
+                  <a:lnTo>
+                    <a:pt x="2077053" y="524789"/>
+                  </a:lnTo>
+                  <a:lnTo>
+                    <a:pt x="2005430" y="509957"/>
+                  </a:lnTo>
+                  <a:lnTo>
+                    <a:pt x="1933808" y="494920"/>
+                  </a:lnTo>
+                  <a:lnTo>
+                    <a:pt x="1862185" y="479674"/>
+                  </a:lnTo>
+                  <a:lnTo>
+                    <a:pt x="1790563" y="464218"/>
+                  </a:lnTo>
+                  <a:lnTo>
+                    <a:pt x="1718940" y="448549"/>
+                  </a:lnTo>
+                  <a:lnTo>
+                    <a:pt x="1647318" y="432662"/>
+                  </a:lnTo>
+                  <a:lnTo>
+                    <a:pt x="1575695" y="416556"/>
+                  </a:lnTo>
+                  <a:lnTo>
+                    <a:pt x="1504073" y="400226"/>
+                  </a:lnTo>
+                  <a:lnTo>
+                    <a:pt x="1432450" y="383672"/>
+                  </a:lnTo>
+                  <a:lnTo>
+                    <a:pt x="1360827" y="366888"/>
+                  </a:lnTo>
+                  <a:lnTo>
+                    <a:pt x="1289205" y="349872"/>
+                  </a:lnTo>
+                  <a:lnTo>
+                    <a:pt x="1217582" y="332620"/>
+                  </a:lnTo>
+                  <a:lnTo>
+                    <a:pt x="1145960" y="315130"/>
+                  </a:lnTo>
+                  <a:lnTo>
+                    <a:pt x="1074337" y="297398"/>
+                  </a:lnTo>
+                  <a:lnTo>
+                    <a:pt x="1002715" y="279421"/>
+                  </a:lnTo>
+                  <a:lnTo>
+                    <a:pt x="931092" y="261195"/>
+                  </a:lnTo>
+                  <a:lnTo>
+                    <a:pt x="859470" y="242717"/>
+                  </a:lnTo>
+                  <a:lnTo>
+                    <a:pt x="787847" y="223983"/>
+                  </a:lnTo>
+                  <a:lnTo>
+                    <a:pt x="716225" y="204991"/>
+                  </a:lnTo>
+                  <a:lnTo>
+                    <a:pt x="644602" y="185735"/>
+                  </a:lnTo>
+                  <a:lnTo>
+                    <a:pt x="572980" y="166214"/>
+                  </a:lnTo>
+                  <a:lnTo>
+                    <a:pt x="501357" y="146422"/>
+                  </a:lnTo>
+                  <a:lnTo>
+                    <a:pt x="429735" y="126357"/>
+                  </a:lnTo>
+                  <a:lnTo>
+                    <a:pt x="358112" y="106014"/>
+                  </a:lnTo>
+                  <a:lnTo>
+                    <a:pt x="286490" y="85389"/>
+                  </a:lnTo>
+                  <a:lnTo>
+                    <a:pt x="214867" y="64480"/>
+                  </a:lnTo>
+                  <a:lnTo>
+                    <a:pt x="143245" y="43281"/>
+                  </a:lnTo>
+                  <a:lnTo>
+                    <a:pt x="71622" y="21789"/>
                   </a:lnTo>
                   <a:lnTo>
                     <a:pt x="0" y="0"/>
@@ -4186,312 +4186,312 @@
           </p:nvSpPr>
           <p:spPr>
             <a:xfrm>
-              <a:off x="1172049" y="2735387"/>
-              <a:ext cx="7090630" cy="2599616"/>
+              <a:off x="1172049" y="2729458"/>
+              <a:ext cx="7090630" cy="2606046"/>
             </a:xfrm>
             <a:custGeom>
               <a:avLst/>
               <a:pathLst>
-                <a:path w="7090630" h="2599616">
+                <a:path w="7090630" h="2606046">
                   <a:moveTo>
                     <a:pt x="0" y="0"/>
                   </a:moveTo>
                   <a:lnTo>
-                    <a:pt x="71622" y="71516"/>
-                  </a:lnTo>
-                  <a:lnTo>
-                    <a:pt x="143245" y="141220"/>
-                  </a:lnTo>
-                  <a:lnTo>
-                    <a:pt x="214867" y="209157"/>
-                  </a:lnTo>
-                  <a:lnTo>
-                    <a:pt x="286490" y="275373"/>
-                  </a:lnTo>
-                  <a:lnTo>
-                    <a:pt x="358112" y="339911"/>
-                  </a:lnTo>
-                  <a:lnTo>
-                    <a:pt x="429735" y="402812"/>
-                  </a:lnTo>
-                  <a:lnTo>
-                    <a:pt x="501357" y="464120"/>
-                  </a:lnTo>
-                  <a:lnTo>
-                    <a:pt x="572980" y="523874"/>
-                  </a:lnTo>
-                  <a:lnTo>
-                    <a:pt x="644602" y="582114"/>
-                  </a:lnTo>
-                  <a:lnTo>
-                    <a:pt x="716225" y="638877"/>
-                  </a:lnTo>
-                  <a:lnTo>
-                    <a:pt x="787847" y="694202"/>
-                  </a:lnTo>
-                  <a:lnTo>
-                    <a:pt x="859470" y="748125"/>
-                  </a:lnTo>
-                  <a:lnTo>
-                    <a:pt x="931092" y="800681"/>
-                  </a:lnTo>
-                  <a:lnTo>
-                    <a:pt x="1002715" y="851905"/>
-                  </a:lnTo>
-                  <a:lnTo>
-                    <a:pt x="1074337" y="901831"/>
-                  </a:lnTo>
-                  <a:lnTo>
-                    <a:pt x="1145960" y="950492"/>
-                  </a:lnTo>
-                  <a:lnTo>
-                    <a:pt x="1217582" y="997919"/>
-                  </a:lnTo>
-                  <a:lnTo>
-                    <a:pt x="1289205" y="1044145"/>
-                  </a:lnTo>
-                  <a:lnTo>
-                    <a:pt x="1360827" y="1089199"/>
-                  </a:lnTo>
-                  <a:lnTo>
-                    <a:pt x="1432450" y="1133111"/>
-                  </a:lnTo>
-                  <a:lnTo>
-                    <a:pt x="1504073" y="1175910"/>
-                  </a:lnTo>
-                  <a:lnTo>
-                    <a:pt x="1575695" y="1217625"/>
-                  </a:lnTo>
-                  <a:lnTo>
-                    <a:pt x="1647318" y="1258282"/>
-                  </a:lnTo>
-                  <a:lnTo>
-                    <a:pt x="1718940" y="1297909"/>
-                  </a:lnTo>
-                  <a:lnTo>
-                    <a:pt x="1790563" y="1336532"/>
-                  </a:lnTo>
-                  <a:lnTo>
-                    <a:pt x="1862185" y="1374175"/>
-                  </a:lnTo>
-                  <a:lnTo>
-                    <a:pt x="1933808" y="1410865"/>
-                  </a:lnTo>
-                  <a:lnTo>
-                    <a:pt x="2005430" y="1446625"/>
-                  </a:lnTo>
-                  <a:lnTo>
-                    <a:pt x="2077053" y="1481479"/>
-                  </a:lnTo>
-                  <a:lnTo>
-                    <a:pt x="2148675" y="1515449"/>
-                  </a:lnTo>
-                  <a:lnTo>
-                    <a:pt x="2220298" y="1548558"/>
-                  </a:lnTo>
-                  <a:lnTo>
-                    <a:pt x="2291920" y="1580829"/>
-                  </a:lnTo>
-                  <a:lnTo>
-                    <a:pt x="2363543" y="1612281"/>
-                  </a:lnTo>
-                  <a:lnTo>
-                    <a:pt x="2435165" y="1642936"/>
-                  </a:lnTo>
-                  <a:lnTo>
-                    <a:pt x="2506788" y="1672815"/>
-                  </a:lnTo>
-                  <a:lnTo>
-                    <a:pt x="2578410" y="1701936"/>
-                  </a:lnTo>
-                  <a:lnTo>
-                    <a:pt x="2650033" y="1730319"/>
-                  </a:lnTo>
-                  <a:lnTo>
-                    <a:pt x="2721655" y="1757983"/>
-                  </a:lnTo>
-                  <a:lnTo>
-                    <a:pt x="2793278" y="1784945"/>
-                  </a:lnTo>
-                  <a:lnTo>
-                    <a:pt x="2864901" y="1811225"/>
-                  </a:lnTo>
-                  <a:lnTo>
-                    <a:pt x="2936523" y="1836838"/>
-                  </a:lnTo>
-                  <a:lnTo>
-                    <a:pt x="3008146" y="1861802"/>
-                  </a:lnTo>
-                  <a:lnTo>
-                    <a:pt x="3079768" y="1886133"/>
-                  </a:lnTo>
-                  <a:lnTo>
-                    <a:pt x="3151391" y="1909848"/>
-                  </a:lnTo>
-                  <a:lnTo>
-                    <a:pt x="3223013" y="1932962"/>
-                  </a:lnTo>
-                  <a:lnTo>
-                    <a:pt x="3294636" y="1955490"/>
-                  </a:lnTo>
-                  <a:lnTo>
-                    <a:pt x="3366258" y="1977447"/>
-                  </a:lnTo>
-                  <a:lnTo>
-                    <a:pt x="3437881" y="1998848"/>
-                  </a:lnTo>
-                  <a:lnTo>
-                    <a:pt x="3509503" y="2019706"/>
-                  </a:lnTo>
-                  <a:lnTo>
-                    <a:pt x="3581126" y="2040036"/>
-                  </a:lnTo>
-                  <a:lnTo>
-                    <a:pt x="3652748" y="2059850"/>
-                  </a:lnTo>
-                  <a:lnTo>
-                    <a:pt x="3724371" y="2079162"/>
-                  </a:lnTo>
-                  <a:lnTo>
-                    <a:pt x="3795993" y="2097985"/>
-                  </a:lnTo>
-                  <a:lnTo>
-                    <a:pt x="3867616" y="2116331"/>
-                  </a:lnTo>
-                  <a:lnTo>
-                    <a:pt x="3939238" y="2134212"/>
-                  </a:lnTo>
-                  <a:lnTo>
-                    <a:pt x="4010861" y="2151639"/>
-                  </a:lnTo>
-                  <a:lnTo>
-                    <a:pt x="4082483" y="2168625"/>
-                  </a:lnTo>
-                  <a:lnTo>
-                    <a:pt x="4154106" y="2185181"/>
-                  </a:lnTo>
-                  <a:lnTo>
-                    <a:pt x="4225729" y="2201316"/>
-                  </a:lnTo>
-                  <a:lnTo>
-                    <a:pt x="4297351" y="2217043"/>
-                  </a:lnTo>
-                  <a:lnTo>
-                    <a:pt x="4368974" y="2232372"/>
-                  </a:lnTo>
-                  <a:lnTo>
-                    <a:pt x="4440596" y="2247312"/>
-                  </a:lnTo>
-                  <a:lnTo>
-                    <a:pt x="4512219" y="2261873"/>
-                  </a:lnTo>
-                  <a:lnTo>
-                    <a:pt x="4583841" y="2276065"/>
-                  </a:lnTo>
-                  <a:lnTo>
-                    <a:pt x="4655464" y="2289898"/>
-                  </a:lnTo>
-                  <a:lnTo>
-                    <a:pt x="4727086" y="2303379"/>
-                  </a:lnTo>
-                  <a:lnTo>
-                    <a:pt x="4798709" y="2316520"/>
-                  </a:lnTo>
-                  <a:lnTo>
-                    <a:pt x="4870331" y="2329327"/>
-                  </a:lnTo>
-                  <a:lnTo>
-                    <a:pt x="4941954" y="2341810"/>
-                  </a:lnTo>
-                  <a:lnTo>
-                    <a:pt x="5013576" y="2353976"/>
-                  </a:lnTo>
-                  <a:lnTo>
-                    <a:pt x="5085199" y="2365834"/>
-                  </a:lnTo>
-                  <a:lnTo>
-                    <a:pt x="5156821" y="2377391"/>
-                  </a:lnTo>
-                  <a:lnTo>
-                    <a:pt x="5228444" y="2388656"/>
-                  </a:lnTo>
-                  <a:lnTo>
-                    <a:pt x="5300066" y="2399635"/>
-                  </a:lnTo>
-                  <a:lnTo>
-                    <a:pt x="5371689" y="2410336"/>
-                  </a:lnTo>
-                  <a:lnTo>
-                    <a:pt x="5443311" y="2420765"/>
-                  </a:lnTo>
-                  <a:lnTo>
-                    <a:pt x="5514934" y="2430931"/>
-                  </a:lnTo>
-                  <a:lnTo>
-                    <a:pt x="5586557" y="2440838"/>
-                  </a:lnTo>
-                  <a:lnTo>
-                    <a:pt x="5658179" y="2450495"/>
-                  </a:lnTo>
-                  <a:lnTo>
-                    <a:pt x="5729802" y="2459907"/>
-                  </a:lnTo>
-                  <a:lnTo>
-                    <a:pt x="5801424" y="2469080"/>
-                  </a:lnTo>
-                  <a:lnTo>
-                    <a:pt x="5873047" y="2478021"/>
-                  </a:lnTo>
-                  <a:lnTo>
-                    <a:pt x="5944669" y="2486735"/>
-                  </a:lnTo>
-                  <a:lnTo>
-                    <a:pt x="6016292" y="2495228"/>
-                  </a:lnTo>
-                  <a:lnTo>
-                    <a:pt x="6087914" y="2503506"/>
-                  </a:lnTo>
-                  <a:lnTo>
-                    <a:pt x="6159537" y="2511575"/>
-                  </a:lnTo>
-                  <a:lnTo>
-                    <a:pt x="6231159" y="2519439"/>
-                  </a:lnTo>
-                  <a:lnTo>
-                    <a:pt x="6302782" y="2527103"/>
-                  </a:lnTo>
-                  <a:lnTo>
-                    <a:pt x="6374404" y="2534573"/>
-                  </a:lnTo>
-                  <a:lnTo>
-                    <a:pt x="6446027" y="2541854"/>
-                  </a:lnTo>
-                  <a:lnTo>
-                    <a:pt x="6517649" y="2548951"/>
-                  </a:lnTo>
-                  <a:lnTo>
-                    <a:pt x="6589272" y="2555867"/>
-                  </a:lnTo>
-                  <a:lnTo>
-                    <a:pt x="6660894" y="2562609"/>
-                  </a:lnTo>
-                  <a:lnTo>
-                    <a:pt x="6732517" y="2569179"/>
-                  </a:lnTo>
-                  <a:lnTo>
-                    <a:pt x="6804139" y="2575583"/>
-                  </a:lnTo>
-                  <a:lnTo>
-                    <a:pt x="6875762" y="2581825"/>
-                  </a:lnTo>
-                  <a:lnTo>
-                    <a:pt x="6947385" y="2587908"/>
-                  </a:lnTo>
-                  <a:lnTo>
-                    <a:pt x="7019007" y="2593837"/>
-                  </a:lnTo>
-                  <a:lnTo>
-                    <a:pt x="7090630" y="2599616"/>
+                    <a:pt x="71622" y="71788"/>
+                  </a:lnTo>
+                  <a:lnTo>
+                    <a:pt x="143245" y="141753"/>
+                  </a:lnTo>
+                  <a:lnTo>
+                    <a:pt x="214867" y="209942"/>
+                  </a:lnTo>
+                  <a:lnTo>
+                    <a:pt x="286490" y="276401"/>
+                  </a:lnTo>
+                  <a:lnTo>
+                    <a:pt x="358112" y="341172"/>
+                  </a:lnTo>
+                  <a:lnTo>
+                    <a:pt x="429735" y="404299"/>
+                  </a:lnTo>
+                  <a:lnTo>
+                    <a:pt x="501357" y="465823"/>
+                  </a:lnTo>
+                  <a:lnTo>
+                    <a:pt x="572980" y="525785"/>
+                  </a:lnTo>
+                  <a:lnTo>
+                    <a:pt x="644602" y="584225"/>
+                  </a:lnTo>
+                  <a:lnTo>
+                    <a:pt x="716225" y="641182"/>
+                  </a:lnTo>
+                  <a:lnTo>
+                    <a:pt x="787847" y="696692"/>
+                  </a:lnTo>
+                  <a:lnTo>
+                    <a:pt x="859470" y="750794"/>
+                  </a:lnTo>
+                  <a:lnTo>
+                    <a:pt x="931092" y="803522"/>
+                  </a:lnTo>
+                  <a:lnTo>
+                    <a:pt x="1002715" y="854911"/>
+                  </a:lnTo>
+                  <a:lnTo>
+                    <a:pt x="1074337" y="904996"/>
+                  </a:lnTo>
+                  <a:lnTo>
+                    <a:pt x="1145960" y="953809"/>
+                  </a:lnTo>
+                  <a:lnTo>
+                    <a:pt x="1217582" y="1001383"/>
+                  </a:lnTo>
+                  <a:lnTo>
+                    <a:pt x="1289205" y="1047749"/>
+                  </a:lnTo>
+                  <a:lnTo>
+                    <a:pt x="1360827" y="1092938"/>
+                  </a:lnTo>
+                  <a:lnTo>
+                    <a:pt x="1432450" y="1136980"/>
+                  </a:lnTo>
+                  <a:lnTo>
+                    <a:pt x="1504073" y="1179904"/>
+                  </a:lnTo>
+                  <a:lnTo>
+                    <a:pt x="1575695" y="1221739"/>
+                  </a:lnTo>
+                  <a:lnTo>
+                    <a:pt x="1647318" y="1262511"/>
+                  </a:lnTo>
+                  <a:lnTo>
+                    <a:pt x="1718940" y="1302248"/>
+                  </a:lnTo>
+                  <a:lnTo>
+                    <a:pt x="1790563" y="1340976"/>
+                  </a:lnTo>
+                  <a:lnTo>
+                    <a:pt x="1862185" y="1378721"/>
+                  </a:lnTo>
+                  <a:lnTo>
+                    <a:pt x="1933808" y="1415508"/>
+                  </a:lnTo>
+                  <a:lnTo>
+                    <a:pt x="2005430" y="1451361"/>
+                  </a:lnTo>
+                  <a:lnTo>
+                    <a:pt x="2077053" y="1486304"/>
+                  </a:lnTo>
+                  <a:lnTo>
+                    <a:pt x="2148675" y="1520360"/>
+                  </a:lnTo>
+                  <a:lnTo>
+                    <a:pt x="2220298" y="1553551"/>
+                  </a:lnTo>
+                  <a:lnTo>
+                    <a:pt x="2291920" y="1585900"/>
+                  </a:lnTo>
+                  <a:lnTo>
+                    <a:pt x="2363543" y="1617427"/>
+                  </a:lnTo>
+                  <a:lnTo>
+                    <a:pt x="2435165" y="1648154"/>
+                  </a:lnTo>
+                  <a:lnTo>
+                    <a:pt x="2506788" y="1678101"/>
+                  </a:lnTo>
+                  <a:lnTo>
+                    <a:pt x="2578410" y="1707288"/>
+                  </a:lnTo>
+                  <a:lnTo>
+                    <a:pt x="2650033" y="1735734"/>
+                  </a:lnTo>
+                  <a:lnTo>
+                    <a:pt x="2721655" y="1763457"/>
+                  </a:lnTo>
+                  <a:lnTo>
+                    <a:pt x="2793278" y="1790477"/>
+                  </a:lnTo>
+                  <a:lnTo>
+                    <a:pt x="2864901" y="1816811"/>
+                  </a:lnTo>
+                  <a:lnTo>
+                    <a:pt x="2936523" y="1842476"/>
+                  </a:lnTo>
+                  <a:lnTo>
+                    <a:pt x="3008146" y="1867490"/>
+                  </a:lnTo>
+                  <a:lnTo>
+                    <a:pt x="3079768" y="1891869"/>
+                  </a:lnTo>
+                  <a:lnTo>
+                    <a:pt x="3151391" y="1915629"/>
+                  </a:lnTo>
+                  <a:lnTo>
+                    <a:pt x="3223013" y="1938786"/>
+                  </a:lnTo>
+                  <a:lnTo>
+                    <a:pt x="3294636" y="1961354"/>
+                  </a:lnTo>
+                  <a:lnTo>
+                    <a:pt x="3366258" y="1983350"/>
+                  </a:lnTo>
+                  <a:lnTo>
+                    <a:pt x="3437881" y="2004788"/>
+                  </a:lnTo>
+                  <a:lnTo>
+                    <a:pt x="3509503" y="2025681"/>
+                  </a:lnTo>
+                  <a:lnTo>
+                    <a:pt x="3581126" y="2046044"/>
+                  </a:lnTo>
+                  <a:lnTo>
+                    <a:pt x="3652748" y="2065890"/>
+                  </a:lnTo>
+                  <a:lnTo>
+                    <a:pt x="3724371" y="2085232"/>
+                  </a:lnTo>
+                  <a:lnTo>
+                    <a:pt x="3795993" y="2104083"/>
+                  </a:lnTo>
+                  <a:lnTo>
+                    <a:pt x="3867616" y="2122455"/>
+                  </a:lnTo>
+                  <a:lnTo>
+                    <a:pt x="3939238" y="2140361"/>
+                  </a:lnTo>
+                  <a:lnTo>
+                    <a:pt x="4010861" y="2157813"/>
+                  </a:lnTo>
+                  <a:lnTo>
+                    <a:pt x="4082483" y="2174821"/>
+                  </a:lnTo>
+                  <a:lnTo>
+                    <a:pt x="4154106" y="2191398"/>
+                  </a:lnTo>
+                  <a:lnTo>
+                    <a:pt x="4225729" y="2207554"/>
+                  </a:lnTo>
+                  <a:lnTo>
+                    <a:pt x="4297351" y="2223300"/>
+                  </a:lnTo>
+                  <a:lnTo>
+                    <a:pt x="4368974" y="2238646"/>
+                  </a:lnTo>
+                  <a:lnTo>
+                    <a:pt x="4440596" y="2253602"/>
+                  </a:lnTo>
+                  <a:lnTo>
+                    <a:pt x="4512219" y="2268179"/>
+                  </a:lnTo>
+                  <a:lnTo>
+                    <a:pt x="4583841" y="2282385"/>
+                  </a:lnTo>
+                  <a:lnTo>
+                    <a:pt x="4655464" y="2296231"/>
+                  </a:lnTo>
+                  <a:lnTo>
+                    <a:pt x="4727086" y="2309726"/>
+                  </a:lnTo>
+                  <a:lnTo>
+                    <a:pt x="4798709" y="2322878"/>
+                  </a:lnTo>
+                  <a:lnTo>
+                    <a:pt x="4870331" y="2335696"/>
+                  </a:lnTo>
+                  <a:lnTo>
+                    <a:pt x="4941954" y="2348188"/>
+                  </a:lnTo>
+                  <a:lnTo>
+                    <a:pt x="5013576" y="2360364"/>
+                  </a:lnTo>
+                  <a:lnTo>
+                    <a:pt x="5085199" y="2372230"/>
+                  </a:lnTo>
+                  <a:lnTo>
+                    <a:pt x="5156821" y="2383795"/>
+                  </a:lnTo>
+                  <a:lnTo>
+                    <a:pt x="5228444" y="2395067"/>
+                  </a:lnTo>
+                  <a:lnTo>
+                    <a:pt x="5300066" y="2406052"/>
+                  </a:lnTo>
+                  <a:lnTo>
+                    <a:pt x="5371689" y="2416759"/>
+                  </a:lnTo>
+                  <a:lnTo>
+                    <a:pt x="5443311" y="2427194"/>
+                  </a:lnTo>
+                  <a:lnTo>
+                    <a:pt x="5514934" y="2437363"/>
+                  </a:lnTo>
+                  <a:lnTo>
+                    <a:pt x="5586557" y="2447275"/>
+                  </a:lnTo>
+                  <a:lnTo>
+                    <a:pt x="5658179" y="2456935"/>
+                  </a:lnTo>
+                  <a:lnTo>
+                    <a:pt x="5729802" y="2466350"/>
+                  </a:lnTo>
+                  <a:lnTo>
+                    <a:pt x="5801424" y="2475525"/>
+                  </a:lnTo>
+                  <a:lnTo>
+                    <a:pt x="5873047" y="2484468"/>
+                  </a:lnTo>
+                  <a:lnTo>
+                    <a:pt x="5944669" y="2493184"/>
+                  </a:lnTo>
+                  <a:lnTo>
+                    <a:pt x="6016292" y="2501679"/>
+                  </a:lnTo>
+                  <a:lnTo>
+                    <a:pt x="6087914" y="2509957"/>
+                  </a:lnTo>
+                  <a:lnTo>
+                    <a:pt x="6159537" y="2518026"/>
+                  </a:lnTo>
+                  <a:lnTo>
+                    <a:pt x="6231159" y="2525890"/>
+                  </a:lnTo>
+                  <a:lnTo>
+                    <a:pt x="6302782" y="2533554"/>
+                  </a:lnTo>
+                  <a:lnTo>
+                    <a:pt x="6374404" y="2541024"/>
+                  </a:lnTo>
+                  <a:lnTo>
+                    <a:pt x="6446027" y="2548304"/>
+                  </a:lnTo>
+                  <a:lnTo>
+                    <a:pt x="6517649" y="2555399"/>
+                  </a:lnTo>
+                  <a:lnTo>
+                    <a:pt x="6589272" y="2562314"/>
+                  </a:lnTo>
+                  <a:lnTo>
+                    <a:pt x="6660894" y="2569054"/>
+                  </a:lnTo>
+                  <a:lnTo>
+                    <a:pt x="6732517" y="2575622"/>
+                  </a:lnTo>
+                  <a:lnTo>
+                    <a:pt x="6804139" y="2582024"/>
+                  </a:lnTo>
+                  <a:lnTo>
+                    <a:pt x="6875762" y="2588263"/>
+                  </a:lnTo>
+                  <a:lnTo>
+                    <a:pt x="6947385" y="2594344"/>
+                  </a:lnTo>
+                  <a:lnTo>
+                    <a:pt x="7019007" y="2600270"/>
+                  </a:lnTo>
+                  <a:lnTo>
+                    <a:pt x="7090630" y="2606046"/>
                   </a:lnTo>
                 </a:path>
               </a:pathLst>
@@ -5099,7 +5099,7 @@
                   <a:latin typeface="Helvetica"/>
                   <a:cs typeface="Helvetica"/>
                 </a:rPr>
-                <a:t>subHR per 10 % decline: 1.36 (1.18-1.57), p_Bonf = &lt;0.001 (n = 6)  |  per IQR decline (Δ = 29.3 %): 2.47 (1.62-3.76)  |  IQR: [-14.6, 14.7] %</a:t>
+                <a:t>subHR per 10 % decline: 1.36 (1.18-1.57), p_Bonf = &lt;0.001 (n = 6)  |  per IQR decline (Δ = 29.3 %): 2.47 (1.62-3.77)  |  IQR: [-14.6, 14.7] %</a:t>
               </a:r>
             </a:p>
           </p:txBody>
